--- a/slides/CSC336-Lecture-30-Application-Security-Basics.pptx
+++ b/slides/CSC336-Lecture-30-Application-Security-Basics.pptx
@@ -3548,79 +3548,44 @@
       </p:sp>
       <p:sp>
         <p:nvSpPr>
-          <p:cNvPr id="6" name="Text 4"/>
-          <p:cNvSpPr txBox="1"/>
-          <p:nvPr/>
-        </p:nvSpPr>
-        <p:spPr>
-          <a:xfrm>
-            <a:off x="640080" y="6446520"/>
-            <a:ext cx="8686800" cy="292608"/>
-          </a:xfrm>
-          <a:prstGeom prst="rect">
-            <a:avLst/>
-          </a:prstGeom>
-          <a:noFill/>
-          <a:ln/>
-        </p:spPr>
-        <p:txBody>
-          <a:bodyPr wrap="square" lIns="0" tIns="0" rIns="0" bIns="0" rtlCol="0" anchor="ctr"/>
-          <a:lstStyle/>
-          <a:p>
-            <a:pPr algn="l" indent="0" marL="0">
-              <a:buNone/>
-            </a:pPr>
-            <a:r>
-              <a:rPr lang="en-US" sz="900" dirty="0">
-                <a:solidFill>
-                  <a:srgbClr val="9AA3D8"/>
-                </a:solidFill>
-                <a:latin typeface="Calibri" pitchFamily="34" charset="0"/>
-                <a:ea typeface="Calibri" pitchFamily="34" charset="-122"/>
-                <a:cs typeface="Calibri" pitchFamily="34" charset="-120"/>
-              </a:rPr>
-              <a:t>Usman Akram  •  COMSATS University Islamabad</a:t>
-            </a:r>
-            <a:endParaRPr lang="en-US" sz="900" dirty="0"/>
-          </a:p>
-        </p:txBody>
-      </p:sp>
-      <p:sp>
-        <p:nvSpPr>
-          <p:cNvPr id="7" name="Text 5"/>
-          <p:cNvSpPr txBox="1"/>
-          <p:nvPr/>
-        </p:nvSpPr>
-        <p:spPr>
-          <a:xfrm>
-            <a:off x="11155680" y="6446520"/>
-            <a:ext cx="457200" cy="292608"/>
-          </a:xfrm>
-          <a:prstGeom prst="rect">
-            <a:avLst/>
-          </a:prstGeom>
-          <a:noFill/>
-          <a:ln/>
-        </p:spPr>
-        <p:txBody>
-          <a:bodyPr wrap="square" lIns="0" tIns="0" rIns="0" bIns="0" rtlCol="0" anchor="ctr"/>
-          <a:lstStyle/>
-          <a:p>
-            <a:pPr algn="r" indent="0" marL="0">
-              <a:buNone/>
-            </a:pPr>
-            <a:r>
-              <a:rPr lang="en-US" sz="900" dirty="0">
-                <a:solidFill>
-                  <a:srgbClr val="9AA3D8"/>
-                </a:solidFill>
-                <a:latin typeface="Calibri" pitchFamily="34" charset="0"/>
-                <a:ea typeface="Calibri" pitchFamily="34" charset="-122"/>
-                <a:cs typeface="Calibri" pitchFamily="34" charset="-120"/>
-              </a:rPr>
-              <a:t>1</a:t>
-            </a:r>
-            <a:endParaRPr lang="en-US" sz="900" dirty="0"/>
+          <p:cNvPr id="8" name="cuinotes-footer-mark"/>
+          <p:cNvSpPr txBox="1"/>
+          <p:nvPr/>
+        </p:nvSpPr>
+        <p:spPr>
+          <a:xfrm>
+            <a:off x="9951720" y="6455664"/>
+            <a:ext cx="2011680" cy="292608"/>
+          </a:xfrm>
+          <a:prstGeom prst="rect">
+            <a:avLst/>
+          </a:prstGeom>
+          <a:noFill/>
+        </p:spPr>
+        <p:txBody>
+          <a:bodyPr wrap="none" lIns="0" rIns="0" tIns="0" bIns="0">
+            <a:spAutoFit/>
+          </a:bodyPr>
+          <a:lstStyle/>
+          <a:p>
+            <a:pPr algn="r"/>
+            <a:r>
+              <a:rPr sz="1000">
+                <a:solidFill>
+                  <a:srgbClr val="8A939B"/>
+                </a:solidFill>
+                <a:hlinkClick r:id="rId3"/>
+              </a:rPr>
+              <a:t>cuinotes.com</a:t>
+            </a:r>
+            <a:r>
+              <a:rPr sz="1000">
+                <a:solidFill>
+                  <a:srgbClr val="8A939B"/>
+                </a:solidFill>
+              </a:rPr>
+              <a:t>  ·  1</a:t>
+            </a:r>
           </a:p>
         </p:txBody>
       </p:sp>
@@ -3753,6 +3718,10 @@
           </a:solidFill>
           <a:ln/>
         </p:spPr>
+        <p:txBody>
+          <a:bodyPr/>
+          <a:p/>
+        </p:txBody>
       </p:sp>
       <p:sp>
         <p:nvSpPr>
@@ -3851,6 +3820,10 @@
           </a:solidFill>
           <a:ln/>
         </p:spPr>
+        <p:txBody>
+          <a:bodyPr/>
+          <a:p/>
+        </p:txBody>
       </p:sp>
       <p:sp>
         <p:nvSpPr>
@@ -3949,6 +3922,10 @@
           </a:solidFill>
           <a:ln/>
         </p:spPr>
+        <p:txBody>
+          <a:bodyPr/>
+          <a:p/>
+        </p:txBody>
       </p:sp>
       <p:sp>
         <p:nvSpPr>
@@ -4030,79 +4007,44 @@
       </p:sp>
       <p:sp>
         <p:nvSpPr>
-          <p:cNvPr id="13" name="Text 11"/>
-          <p:cNvSpPr txBox="1"/>
-          <p:nvPr/>
-        </p:nvSpPr>
-        <p:spPr>
-          <a:xfrm>
-            <a:off x="640080" y="6446520"/>
-            <a:ext cx="8686800" cy="292608"/>
-          </a:xfrm>
-          <a:prstGeom prst="rect">
-            <a:avLst/>
-          </a:prstGeom>
-          <a:noFill/>
-          <a:ln/>
-        </p:spPr>
-        <p:txBody>
-          <a:bodyPr wrap="square" lIns="0" tIns="0" rIns="0" bIns="0" rtlCol="0" anchor="ctr"/>
-          <a:lstStyle/>
-          <a:p>
-            <a:pPr algn="l" indent="0" marL="0">
-              <a:buNone/>
-            </a:pPr>
-            <a:r>
-              <a:rPr lang="en-US" sz="900" dirty="0">
-                <a:solidFill>
-                  <a:srgbClr val="5D5D72"/>
-                </a:solidFill>
-                <a:latin typeface="Calibri" pitchFamily="34" charset="0"/>
-                <a:ea typeface="Calibri" pitchFamily="34" charset="-122"/>
-                <a:cs typeface="Calibri" pitchFamily="34" charset="-120"/>
-              </a:rPr>
-              <a:t>Usman Akram  •  COMSATS University Islamabad</a:t>
-            </a:r>
-            <a:endParaRPr lang="en-US" sz="900" dirty="0"/>
-          </a:p>
-        </p:txBody>
-      </p:sp>
-      <p:sp>
-        <p:nvSpPr>
-          <p:cNvPr id="14" name="Text 12"/>
-          <p:cNvSpPr txBox="1"/>
-          <p:nvPr/>
-        </p:nvSpPr>
-        <p:spPr>
-          <a:xfrm>
-            <a:off x="11155680" y="6446520"/>
-            <a:ext cx="457200" cy="292608"/>
-          </a:xfrm>
-          <a:prstGeom prst="rect">
-            <a:avLst/>
-          </a:prstGeom>
-          <a:noFill/>
-          <a:ln/>
-        </p:spPr>
-        <p:txBody>
-          <a:bodyPr wrap="square" lIns="0" tIns="0" rIns="0" bIns="0" rtlCol="0" anchor="ctr"/>
-          <a:lstStyle/>
-          <a:p>
-            <a:pPr algn="r" indent="0" marL="0">
-              <a:buNone/>
-            </a:pPr>
-            <a:r>
-              <a:rPr lang="en-US" sz="900" dirty="0">
-                <a:solidFill>
-                  <a:srgbClr val="5D5D72"/>
-                </a:solidFill>
-                <a:latin typeface="Calibri" pitchFamily="34" charset="0"/>
-                <a:ea typeface="Calibri" pitchFamily="34" charset="-122"/>
-                <a:cs typeface="Calibri" pitchFamily="34" charset="-120"/>
-              </a:rPr>
-              <a:t>10</a:t>
-            </a:r>
-            <a:endParaRPr lang="en-US" sz="900" dirty="0"/>
+          <p:cNvPr id="15" name="cuinotes-footer-mark"/>
+          <p:cNvSpPr txBox="1"/>
+          <p:nvPr/>
+        </p:nvSpPr>
+        <p:spPr>
+          <a:xfrm>
+            <a:off x="9951720" y="6455664"/>
+            <a:ext cx="2011680" cy="292608"/>
+          </a:xfrm>
+          <a:prstGeom prst="rect">
+            <a:avLst/>
+          </a:prstGeom>
+          <a:noFill/>
+        </p:spPr>
+        <p:txBody>
+          <a:bodyPr wrap="none" lIns="0" rIns="0" tIns="0" bIns="0">
+            <a:spAutoFit/>
+          </a:bodyPr>
+          <a:lstStyle/>
+          <a:p>
+            <a:pPr algn="r"/>
+            <a:r>
+              <a:rPr sz="1000">
+                <a:solidFill>
+                  <a:srgbClr val="8A939B"/>
+                </a:solidFill>
+                <a:hlinkClick r:id="rId3"/>
+              </a:rPr>
+              <a:t>cuinotes.com</a:t>
+            </a:r>
+            <a:r>
+              <a:rPr sz="1000">
+                <a:solidFill>
+                  <a:srgbClr val="8A939B"/>
+                </a:solidFill>
+              </a:rPr>
+              <a:t>  ·  10</a:t>
+            </a:r>
           </a:p>
         </p:txBody>
       </p:sp>
@@ -4237,6 +4179,10 @@
           </a:solidFill>
           <a:ln/>
         </p:spPr>
+        <p:txBody>
+          <a:bodyPr/>
+          <a:p/>
+        </p:txBody>
       </p:sp>
       <p:sp>
         <p:nvSpPr>
@@ -4300,6 +4246,10 @@
             <a:tailEnd type="triangle"/>
           </a:ln>
         </p:spPr>
+        <p:txBody>
+          <a:bodyPr/>
+          <a:p/>
+        </p:txBody>
       </p:sp>
       <p:sp>
         <p:nvSpPr>
@@ -4322,6 +4272,10 @@
           </a:solidFill>
           <a:ln/>
         </p:spPr>
+        <p:txBody>
+          <a:bodyPr/>
+          <a:p/>
+        </p:txBody>
       </p:sp>
       <p:sp>
         <p:nvSpPr>
@@ -4402,6 +4356,10 @@
             <a:tailEnd type="triangle"/>
           </a:ln>
         </p:spPr>
+        <p:txBody>
+          <a:bodyPr/>
+          <a:p/>
+        </p:txBody>
       </p:sp>
       <p:sp>
         <p:nvSpPr>
@@ -4424,6 +4382,10 @@
           </a:solidFill>
           <a:ln/>
         </p:spPr>
+        <p:txBody>
+          <a:bodyPr/>
+          <a:p/>
+        </p:txBody>
       </p:sp>
       <p:sp>
         <p:nvSpPr>
@@ -4504,6 +4466,10 @@
             <a:tailEnd type="triangle"/>
           </a:ln>
         </p:spPr>
+        <p:txBody>
+          <a:bodyPr/>
+          <a:p/>
+        </p:txBody>
       </p:sp>
       <p:sp>
         <p:nvSpPr>
@@ -4526,6 +4492,10 @@
           </a:solidFill>
           <a:ln/>
         </p:spPr>
+        <p:txBody>
+          <a:bodyPr/>
+          <a:p/>
+        </p:txBody>
       </p:sp>
       <p:sp>
         <p:nvSpPr>
@@ -4606,6 +4576,10 @@
             <a:tailEnd type="triangle"/>
           </a:ln>
         </p:spPr>
+        <p:txBody>
+          <a:bodyPr/>
+          <a:p/>
+        </p:txBody>
       </p:sp>
       <p:sp>
         <p:nvSpPr>
@@ -4628,6 +4602,10 @@
           </a:solidFill>
           <a:ln/>
         </p:spPr>
+        <p:txBody>
+          <a:bodyPr/>
+          <a:p/>
+        </p:txBody>
       </p:sp>
       <p:sp>
         <p:nvSpPr>
@@ -4708,6 +4686,10 @@
             <a:tailEnd type="triangle"/>
           </a:ln>
         </p:spPr>
+        <p:txBody>
+          <a:bodyPr/>
+          <a:p/>
+        </p:txBody>
       </p:sp>
       <p:sp>
         <p:nvSpPr>
@@ -4730,6 +4712,10 @@
           </a:solidFill>
           <a:ln/>
         </p:spPr>
+        <p:txBody>
+          <a:bodyPr/>
+          <a:p/>
+        </p:txBody>
       </p:sp>
       <p:sp>
         <p:nvSpPr>
@@ -4828,79 +4814,44 @@
       </p:sp>
       <p:sp>
         <p:nvSpPr>
-          <p:cNvPr id="22" name="Text 20"/>
-          <p:cNvSpPr txBox="1"/>
-          <p:nvPr/>
-        </p:nvSpPr>
-        <p:spPr>
-          <a:xfrm>
-            <a:off x="640080" y="6446520"/>
-            <a:ext cx="8686800" cy="292608"/>
-          </a:xfrm>
-          <a:prstGeom prst="rect">
-            <a:avLst/>
-          </a:prstGeom>
-          <a:noFill/>
-          <a:ln/>
-        </p:spPr>
-        <p:txBody>
-          <a:bodyPr wrap="square" lIns="0" tIns="0" rIns="0" bIns="0" rtlCol="0" anchor="ctr"/>
-          <a:lstStyle/>
-          <a:p>
-            <a:pPr algn="l" indent="0" marL="0">
-              <a:buNone/>
-            </a:pPr>
-            <a:r>
-              <a:rPr lang="en-US" sz="900" dirty="0">
-                <a:solidFill>
-                  <a:srgbClr val="5D5D72"/>
-                </a:solidFill>
-                <a:latin typeface="Calibri" pitchFamily="34" charset="0"/>
-                <a:ea typeface="Calibri" pitchFamily="34" charset="-122"/>
-                <a:cs typeface="Calibri" pitchFamily="34" charset="-120"/>
-              </a:rPr>
-              <a:t>Usman Akram  •  COMSATS University Islamabad</a:t>
-            </a:r>
-            <a:endParaRPr lang="en-US" sz="900" dirty="0"/>
-          </a:p>
-        </p:txBody>
-      </p:sp>
-      <p:sp>
-        <p:nvSpPr>
-          <p:cNvPr id="23" name="Text 21"/>
-          <p:cNvSpPr txBox="1"/>
-          <p:nvPr/>
-        </p:nvSpPr>
-        <p:spPr>
-          <a:xfrm>
-            <a:off x="11155680" y="6446520"/>
-            <a:ext cx="457200" cy="292608"/>
-          </a:xfrm>
-          <a:prstGeom prst="rect">
-            <a:avLst/>
-          </a:prstGeom>
-          <a:noFill/>
-          <a:ln/>
-        </p:spPr>
-        <p:txBody>
-          <a:bodyPr wrap="square" lIns="0" tIns="0" rIns="0" bIns="0" rtlCol="0" anchor="ctr"/>
-          <a:lstStyle/>
-          <a:p>
-            <a:pPr algn="r" indent="0" marL="0">
-              <a:buNone/>
-            </a:pPr>
-            <a:r>
-              <a:rPr lang="en-US" sz="900" dirty="0">
-                <a:solidFill>
-                  <a:srgbClr val="5D5D72"/>
-                </a:solidFill>
-                <a:latin typeface="Calibri" pitchFamily="34" charset="0"/>
-                <a:ea typeface="Calibri" pitchFamily="34" charset="-122"/>
-                <a:cs typeface="Calibri" pitchFamily="34" charset="-120"/>
-              </a:rPr>
-              <a:t>11</a:t>
-            </a:r>
-            <a:endParaRPr lang="en-US" sz="900" dirty="0"/>
+          <p:cNvPr id="24" name="cuinotes-footer-mark"/>
+          <p:cNvSpPr txBox="1"/>
+          <p:nvPr/>
+        </p:nvSpPr>
+        <p:spPr>
+          <a:xfrm>
+            <a:off x="9951720" y="6455664"/>
+            <a:ext cx="2011680" cy="292608"/>
+          </a:xfrm>
+          <a:prstGeom prst="rect">
+            <a:avLst/>
+          </a:prstGeom>
+          <a:noFill/>
+        </p:spPr>
+        <p:txBody>
+          <a:bodyPr wrap="none" lIns="0" rIns="0" tIns="0" bIns="0">
+            <a:spAutoFit/>
+          </a:bodyPr>
+          <a:lstStyle/>
+          <a:p>
+            <a:pPr algn="r"/>
+            <a:r>
+              <a:rPr sz="1000">
+                <a:solidFill>
+                  <a:srgbClr val="8A939B"/>
+                </a:solidFill>
+                <a:hlinkClick r:id="rId3"/>
+              </a:rPr>
+              <a:t>cuinotes.com</a:t>
+            </a:r>
+            <a:r>
+              <a:rPr sz="1000">
+                <a:solidFill>
+                  <a:srgbClr val="8A939B"/>
+                </a:solidFill>
+              </a:rPr>
+              <a:t>  ·  11</a:t>
+            </a:r>
           </a:p>
         </p:txBody>
       </p:sp>
@@ -5033,6 +4984,10 @@
           </a:solidFill>
           <a:ln/>
         </p:spPr>
+        <p:txBody>
+          <a:bodyPr/>
+          <a:p/>
+        </p:txBody>
       </p:sp>
       <p:sp>
         <p:nvSpPr>
@@ -5131,6 +5086,10 @@
           </a:solidFill>
           <a:ln/>
         </p:spPr>
+        <p:txBody>
+          <a:bodyPr/>
+          <a:p/>
+        </p:txBody>
       </p:sp>
       <p:sp>
         <p:nvSpPr>
@@ -5229,6 +5188,10 @@
           </a:solidFill>
           <a:ln/>
         </p:spPr>
+        <p:txBody>
+          <a:bodyPr/>
+          <a:p/>
+        </p:txBody>
       </p:sp>
       <p:sp>
         <p:nvSpPr>
@@ -5310,79 +5273,44 @@
       </p:sp>
       <p:sp>
         <p:nvSpPr>
-          <p:cNvPr id="13" name="Text 11"/>
-          <p:cNvSpPr txBox="1"/>
-          <p:nvPr/>
-        </p:nvSpPr>
-        <p:spPr>
-          <a:xfrm>
-            <a:off x="640080" y="6446520"/>
-            <a:ext cx="8686800" cy="292608"/>
-          </a:xfrm>
-          <a:prstGeom prst="rect">
-            <a:avLst/>
-          </a:prstGeom>
-          <a:noFill/>
-          <a:ln/>
-        </p:spPr>
-        <p:txBody>
-          <a:bodyPr wrap="square" lIns="0" tIns="0" rIns="0" bIns="0" rtlCol="0" anchor="ctr"/>
-          <a:lstStyle/>
-          <a:p>
-            <a:pPr algn="l" indent="0" marL="0">
-              <a:buNone/>
-            </a:pPr>
-            <a:r>
-              <a:rPr lang="en-US" sz="900" dirty="0">
-                <a:solidFill>
-                  <a:srgbClr val="5D5D72"/>
-                </a:solidFill>
-                <a:latin typeface="Calibri" pitchFamily="34" charset="0"/>
-                <a:ea typeface="Calibri" pitchFamily="34" charset="-122"/>
-                <a:cs typeface="Calibri" pitchFamily="34" charset="-120"/>
-              </a:rPr>
-              <a:t>Usman Akram  •  COMSATS University Islamabad</a:t>
-            </a:r>
-            <a:endParaRPr lang="en-US" sz="900" dirty="0"/>
-          </a:p>
-        </p:txBody>
-      </p:sp>
-      <p:sp>
-        <p:nvSpPr>
-          <p:cNvPr id="14" name="Text 12"/>
-          <p:cNvSpPr txBox="1"/>
-          <p:nvPr/>
-        </p:nvSpPr>
-        <p:spPr>
-          <a:xfrm>
-            <a:off x="11155680" y="6446520"/>
-            <a:ext cx="457200" cy="292608"/>
-          </a:xfrm>
-          <a:prstGeom prst="rect">
-            <a:avLst/>
-          </a:prstGeom>
-          <a:noFill/>
-          <a:ln/>
-        </p:spPr>
-        <p:txBody>
-          <a:bodyPr wrap="square" lIns="0" tIns="0" rIns="0" bIns="0" rtlCol="0" anchor="ctr"/>
-          <a:lstStyle/>
-          <a:p>
-            <a:pPr algn="r" indent="0" marL="0">
-              <a:buNone/>
-            </a:pPr>
-            <a:r>
-              <a:rPr lang="en-US" sz="900" dirty="0">
-                <a:solidFill>
-                  <a:srgbClr val="5D5D72"/>
-                </a:solidFill>
-                <a:latin typeface="Calibri" pitchFamily="34" charset="0"/>
-                <a:ea typeface="Calibri" pitchFamily="34" charset="-122"/>
-                <a:cs typeface="Calibri" pitchFamily="34" charset="-120"/>
-              </a:rPr>
-              <a:t>12</a:t>
-            </a:r>
-            <a:endParaRPr lang="en-US" sz="900" dirty="0"/>
+          <p:cNvPr id="15" name="cuinotes-footer-mark"/>
+          <p:cNvSpPr txBox="1"/>
+          <p:nvPr/>
+        </p:nvSpPr>
+        <p:spPr>
+          <a:xfrm>
+            <a:off x="9951720" y="6455664"/>
+            <a:ext cx="2011680" cy="292608"/>
+          </a:xfrm>
+          <a:prstGeom prst="rect">
+            <a:avLst/>
+          </a:prstGeom>
+          <a:noFill/>
+        </p:spPr>
+        <p:txBody>
+          <a:bodyPr wrap="none" lIns="0" rIns="0" tIns="0" bIns="0">
+            <a:spAutoFit/>
+          </a:bodyPr>
+          <a:lstStyle/>
+          <a:p>
+            <a:pPr algn="r"/>
+            <a:r>
+              <a:rPr sz="1000">
+                <a:solidFill>
+                  <a:srgbClr val="8A939B"/>
+                </a:solidFill>
+                <a:hlinkClick r:id="rId3"/>
+              </a:rPr>
+              <a:t>cuinotes.com</a:t>
+            </a:r>
+            <a:r>
+              <a:rPr sz="1000">
+                <a:solidFill>
+                  <a:srgbClr val="8A939B"/>
+                </a:solidFill>
+              </a:rPr>
+              <a:t>  ·  12</a:t>
+            </a:r>
           </a:p>
         </p:txBody>
       </p:sp>
@@ -6080,79 +6008,44 @@
       </p:graphicFrame>
       <p:sp>
         <p:nvSpPr>
-          <p:cNvPr id="5" name="Text 2"/>
-          <p:cNvSpPr txBox="1"/>
-          <p:nvPr/>
-        </p:nvSpPr>
-        <p:spPr>
-          <a:xfrm>
-            <a:off x="640080" y="6446520"/>
-            <a:ext cx="8686800" cy="292608"/>
-          </a:xfrm>
-          <a:prstGeom prst="rect">
-            <a:avLst/>
-          </a:prstGeom>
-          <a:noFill/>
-          <a:ln/>
-        </p:spPr>
-        <p:txBody>
-          <a:bodyPr wrap="square" lIns="0" tIns="0" rIns="0" bIns="0" rtlCol="0" anchor="ctr"/>
-          <a:lstStyle/>
-          <a:p>
-            <a:pPr algn="l" indent="0" marL="0">
-              <a:buNone/>
-            </a:pPr>
-            <a:r>
-              <a:rPr lang="en-US" sz="900" dirty="0">
-                <a:solidFill>
-                  <a:srgbClr val="5D5D72"/>
-                </a:solidFill>
-                <a:latin typeface="Calibri" pitchFamily="34" charset="0"/>
-                <a:ea typeface="Calibri" pitchFamily="34" charset="-122"/>
-                <a:cs typeface="Calibri" pitchFamily="34" charset="-120"/>
-              </a:rPr>
-              <a:t>Usman Akram  •  COMSATS University Islamabad</a:t>
-            </a:r>
-            <a:endParaRPr lang="en-US" sz="900" dirty="0"/>
-          </a:p>
-        </p:txBody>
-      </p:sp>
-      <p:sp>
-        <p:nvSpPr>
-          <p:cNvPr id="6" name="Text 3"/>
-          <p:cNvSpPr txBox="1"/>
-          <p:nvPr/>
-        </p:nvSpPr>
-        <p:spPr>
-          <a:xfrm>
-            <a:off x="11155680" y="6446520"/>
-            <a:ext cx="457200" cy="292608"/>
-          </a:xfrm>
-          <a:prstGeom prst="rect">
-            <a:avLst/>
-          </a:prstGeom>
-          <a:noFill/>
-          <a:ln/>
-        </p:spPr>
-        <p:txBody>
-          <a:bodyPr wrap="square" lIns="0" tIns="0" rIns="0" bIns="0" rtlCol="0" anchor="ctr"/>
-          <a:lstStyle/>
-          <a:p>
-            <a:pPr algn="r" indent="0" marL="0">
-              <a:buNone/>
-            </a:pPr>
-            <a:r>
-              <a:rPr lang="en-US" sz="900" dirty="0">
-                <a:solidFill>
-                  <a:srgbClr val="5D5D72"/>
-                </a:solidFill>
-                <a:latin typeface="Calibri" pitchFamily="34" charset="0"/>
-                <a:ea typeface="Calibri" pitchFamily="34" charset="-122"/>
-                <a:cs typeface="Calibri" pitchFamily="34" charset="-120"/>
-              </a:rPr>
-              <a:t>13</a:t>
-            </a:r>
-            <a:endParaRPr lang="en-US" sz="900" dirty="0"/>
+          <p:cNvPr id="15" name="cuinotes-footer-mark"/>
+          <p:cNvSpPr txBox="1"/>
+          <p:nvPr/>
+        </p:nvSpPr>
+        <p:spPr>
+          <a:xfrm>
+            <a:off x="9951720" y="6455664"/>
+            <a:ext cx="2011680" cy="292608"/>
+          </a:xfrm>
+          <a:prstGeom prst="rect">
+            <a:avLst/>
+          </a:prstGeom>
+          <a:noFill/>
+        </p:spPr>
+        <p:txBody>
+          <a:bodyPr wrap="none" lIns="0" rIns="0" tIns="0" bIns="0">
+            <a:spAutoFit/>
+          </a:bodyPr>
+          <a:lstStyle/>
+          <a:p>
+            <a:pPr algn="r"/>
+            <a:r>
+              <a:rPr sz="1000">
+                <a:solidFill>
+                  <a:srgbClr val="8A939B"/>
+                </a:solidFill>
+                <a:hlinkClick r:id="rId3"/>
+              </a:rPr>
+              <a:t>cuinotes.com</a:t>
+            </a:r>
+            <a:r>
+              <a:rPr sz="1000">
+                <a:solidFill>
+                  <a:srgbClr val="8A939B"/>
+                </a:solidFill>
+              </a:rPr>
+              <a:t>  ·  13</a:t>
+            </a:r>
           </a:p>
         </p:txBody>
       </p:sp>
@@ -6285,6 +6178,10 @@
           </a:solidFill>
           <a:ln/>
         </p:spPr>
+        <p:txBody>
+          <a:bodyPr/>
+          <a:p/>
+        </p:txBody>
       </p:sp>
       <p:sp>
         <p:nvSpPr>
@@ -6383,6 +6280,10 @@
           </a:solidFill>
           <a:ln/>
         </p:spPr>
+        <p:txBody>
+          <a:bodyPr/>
+          <a:p/>
+        </p:txBody>
       </p:sp>
       <p:sp>
         <p:nvSpPr>
@@ -6481,6 +6382,10 @@
           </a:solidFill>
           <a:ln/>
         </p:spPr>
+        <p:txBody>
+          <a:bodyPr/>
+          <a:p/>
+        </p:txBody>
       </p:sp>
       <p:sp>
         <p:nvSpPr>
@@ -6562,79 +6467,44 @@
       </p:sp>
       <p:sp>
         <p:nvSpPr>
-          <p:cNvPr id="13" name="Text 11"/>
-          <p:cNvSpPr txBox="1"/>
-          <p:nvPr/>
-        </p:nvSpPr>
-        <p:spPr>
-          <a:xfrm>
-            <a:off x="640080" y="6446520"/>
-            <a:ext cx="8686800" cy="292608"/>
-          </a:xfrm>
-          <a:prstGeom prst="rect">
-            <a:avLst/>
-          </a:prstGeom>
-          <a:noFill/>
-          <a:ln/>
-        </p:spPr>
-        <p:txBody>
-          <a:bodyPr wrap="square" lIns="0" tIns="0" rIns="0" bIns="0" rtlCol="0" anchor="ctr"/>
-          <a:lstStyle/>
-          <a:p>
-            <a:pPr algn="l" indent="0" marL="0">
-              <a:buNone/>
-            </a:pPr>
-            <a:r>
-              <a:rPr lang="en-US" sz="900" dirty="0">
-                <a:solidFill>
-                  <a:srgbClr val="5D5D72"/>
-                </a:solidFill>
-                <a:latin typeface="Calibri" pitchFamily="34" charset="0"/>
-                <a:ea typeface="Calibri" pitchFamily="34" charset="-122"/>
-                <a:cs typeface="Calibri" pitchFamily="34" charset="-120"/>
-              </a:rPr>
-              <a:t>Usman Akram  •  COMSATS University Islamabad</a:t>
-            </a:r>
-            <a:endParaRPr lang="en-US" sz="900" dirty="0"/>
-          </a:p>
-        </p:txBody>
-      </p:sp>
-      <p:sp>
-        <p:nvSpPr>
-          <p:cNvPr id="14" name="Text 12"/>
-          <p:cNvSpPr txBox="1"/>
-          <p:nvPr/>
-        </p:nvSpPr>
-        <p:spPr>
-          <a:xfrm>
-            <a:off x="11155680" y="6446520"/>
-            <a:ext cx="457200" cy="292608"/>
-          </a:xfrm>
-          <a:prstGeom prst="rect">
-            <a:avLst/>
-          </a:prstGeom>
-          <a:noFill/>
-          <a:ln/>
-        </p:spPr>
-        <p:txBody>
-          <a:bodyPr wrap="square" lIns="0" tIns="0" rIns="0" bIns="0" rtlCol="0" anchor="ctr"/>
-          <a:lstStyle/>
-          <a:p>
-            <a:pPr algn="r" indent="0" marL="0">
-              <a:buNone/>
-            </a:pPr>
-            <a:r>
-              <a:rPr lang="en-US" sz="900" dirty="0">
-                <a:solidFill>
-                  <a:srgbClr val="5D5D72"/>
-                </a:solidFill>
-                <a:latin typeface="Calibri" pitchFamily="34" charset="0"/>
-                <a:ea typeface="Calibri" pitchFamily="34" charset="-122"/>
-                <a:cs typeface="Calibri" pitchFamily="34" charset="-120"/>
-              </a:rPr>
-              <a:t>14</a:t>
-            </a:r>
-            <a:endParaRPr lang="en-US" sz="900" dirty="0"/>
+          <p:cNvPr id="15" name="cuinotes-footer-mark"/>
+          <p:cNvSpPr txBox="1"/>
+          <p:nvPr/>
+        </p:nvSpPr>
+        <p:spPr>
+          <a:xfrm>
+            <a:off x="9951720" y="6455664"/>
+            <a:ext cx="2011680" cy="292608"/>
+          </a:xfrm>
+          <a:prstGeom prst="rect">
+            <a:avLst/>
+          </a:prstGeom>
+          <a:noFill/>
+        </p:spPr>
+        <p:txBody>
+          <a:bodyPr wrap="none" lIns="0" rIns="0" tIns="0" bIns="0">
+            <a:spAutoFit/>
+          </a:bodyPr>
+          <a:lstStyle/>
+          <a:p>
+            <a:pPr algn="r"/>
+            <a:r>
+              <a:rPr sz="1000">
+                <a:solidFill>
+                  <a:srgbClr val="8A939B"/>
+                </a:solidFill>
+                <a:hlinkClick r:id="rId3"/>
+              </a:rPr>
+              <a:t>cuinotes.com</a:t>
+            </a:r>
+            <a:r>
+              <a:rPr sz="1000">
+                <a:solidFill>
+                  <a:srgbClr val="8A939B"/>
+                </a:solidFill>
+              </a:rPr>
+              <a:t>  ·  14</a:t>
+            </a:r>
           </a:p>
         </p:txBody>
       </p:sp>
@@ -6769,6 +6639,10 @@
           </a:solidFill>
           <a:ln/>
         </p:spPr>
+        <p:txBody>
+          <a:bodyPr/>
+          <a:p/>
+        </p:txBody>
       </p:sp>
       <p:sp>
         <p:nvSpPr>
@@ -6849,6 +6723,10 @@
             <a:tailEnd type="triangle"/>
           </a:ln>
         </p:spPr>
+        <p:txBody>
+          <a:bodyPr/>
+          <a:p/>
+        </p:txBody>
       </p:sp>
       <p:sp>
         <p:nvSpPr>
@@ -6871,6 +6749,10 @@
           </a:solidFill>
           <a:ln/>
         </p:spPr>
+        <p:txBody>
+          <a:bodyPr/>
+          <a:p/>
+        </p:txBody>
       </p:sp>
       <p:sp>
         <p:nvSpPr>
@@ -6951,6 +6833,10 @@
             <a:tailEnd type="triangle"/>
           </a:ln>
         </p:spPr>
+        <p:txBody>
+          <a:bodyPr/>
+          <a:p/>
+        </p:txBody>
       </p:sp>
       <p:sp>
         <p:nvSpPr>
@@ -6973,6 +6859,10 @@
           </a:solidFill>
           <a:ln/>
         </p:spPr>
+        <p:txBody>
+          <a:bodyPr/>
+          <a:p/>
+        </p:txBody>
       </p:sp>
       <p:sp>
         <p:nvSpPr>
@@ -7053,6 +6943,10 @@
             <a:tailEnd type="triangle"/>
           </a:ln>
         </p:spPr>
+        <p:txBody>
+          <a:bodyPr/>
+          <a:p/>
+        </p:txBody>
       </p:sp>
       <p:sp>
         <p:nvSpPr>
@@ -7075,6 +6969,10 @@
           </a:solidFill>
           <a:ln/>
         </p:spPr>
+        <p:txBody>
+          <a:bodyPr/>
+          <a:p/>
+        </p:txBody>
       </p:sp>
       <p:sp>
         <p:nvSpPr>
@@ -7155,6 +7053,10 @@
             <a:tailEnd type="triangle"/>
           </a:ln>
         </p:spPr>
+        <p:txBody>
+          <a:bodyPr/>
+          <a:p/>
+        </p:txBody>
       </p:sp>
       <p:sp>
         <p:nvSpPr>
@@ -7177,6 +7079,10 @@
           </a:solidFill>
           <a:ln/>
         </p:spPr>
+        <p:txBody>
+          <a:bodyPr/>
+          <a:p/>
+        </p:txBody>
       </p:sp>
       <p:sp>
         <p:nvSpPr>
@@ -7275,79 +7181,44 @@
       </p:sp>
       <p:sp>
         <p:nvSpPr>
-          <p:cNvPr id="19" name="Text 17"/>
-          <p:cNvSpPr txBox="1"/>
-          <p:nvPr/>
-        </p:nvSpPr>
-        <p:spPr>
-          <a:xfrm>
-            <a:off x="640080" y="6446520"/>
-            <a:ext cx="8686800" cy="292608"/>
-          </a:xfrm>
-          <a:prstGeom prst="rect">
-            <a:avLst/>
-          </a:prstGeom>
-          <a:noFill/>
-          <a:ln/>
-        </p:spPr>
-        <p:txBody>
-          <a:bodyPr wrap="square" lIns="0" tIns="0" rIns="0" bIns="0" rtlCol="0" anchor="ctr"/>
-          <a:lstStyle/>
-          <a:p>
-            <a:pPr algn="l" indent="0" marL="0">
-              <a:buNone/>
-            </a:pPr>
-            <a:r>
-              <a:rPr lang="en-US" sz="900" dirty="0">
-                <a:solidFill>
-                  <a:srgbClr val="5D5D72"/>
-                </a:solidFill>
-                <a:latin typeface="Calibri" pitchFamily="34" charset="0"/>
-                <a:ea typeface="Calibri" pitchFamily="34" charset="-122"/>
-                <a:cs typeface="Calibri" pitchFamily="34" charset="-120"/>
-              </a:rPr>
-              <a:t>Usman Akram  •  COMSATS University Islamabad</a:t>
-            </a:r>
-            <a:endParaRPr lang="en-US" sz="900" dirty="0"/>
-          </a:p>
-        </p:txBody>
-      </p:sp>
-      <p:sp>
-        <p:nvSpPr>
-          <p:cNvPr id="20" name="Text 18"/>
-          <p:cNvSpPr txBox="1"/>
-          <p:nvPr/>
-        </p:nvSpPr>
-        <p:spPr>
-          <a:xfrm>
-            <a:off x="11155680" y="6446520"/>
-            <a:ext cx="457200" cy="292608"/>
-          </a:xfrm>
-          <a:prstGeom prst="rect">
-            <a:avLst/>
-          </a:prstGeom>
-          <a:noFill/>
-          <a:ln/>
-        </p:spPr>
-        <p:txBody>
-          <a:bodyPr wrap="square" lIns="0" tIns="0" rIns="0" bIns="0" rtlCol="0" anchor="ctr"/>
-          <a:lstStyle/>
-          <a:p>
-            <a:pPr algn="r" indent="0" marL="0">
-              <a:buNone/>
-            </a:pPr>
-            <a:r>
-              <a:rPr lang="en-US" sz="900" dirty="0">
-                <a:solidFill>
-                  <a:srgbClr val="5D5D72"/>
-                </a:solidFill>
-                <a:latin typeface="Calibri" pitchFamily="34" charset="0"/>
-                <a:ea typeface="Calibri" pitchFamily="34" charset="-122"/>
-                <a:cs typeface="Calibri" pitchFamily="34" charset="-120"/>
-              </a:rPr>
-              <a:t>15</a:t>
-            </a:r>
-            <a:endParaRPr lang="en-US" sz="900" dirty="0"/>
+          <p:cNvPr id="21" name="cuinotes-footer-mark"/>
+          <p:cNvSpPr txBox="1"/>
+          <p:nvPr/>
+        </p:nvSpPr>
+        <p:spPr>
+          <a:xfrm>
+            <a:off x="9951720" y="6455664"/>
+            <a:ext cx="2011680" cy="292608"/>
+          </a:xfrm>
+          <a:prstGeom prst="rect">
+            <a:avLst/>
+          </a:prstGeom>
+          <a:noFill/>
+        </p:spPr>
+        <p:txBody>
+          <a:bodyPr wrap="none" lIns="0" rIns="0" tIns="0" bIns="0">
+            <a:spAutoFit/>
+          </a:bodyPr>
+          <a:lstStyle/>
+          <a:p>
+            <a:pPr algn="r"/>
+            <a:r>
+              <a:rPr sz="1000">
+                <a:solidFill>
+                  <a:srgbClr val="8A939B"/>
+                </a:solidFill>
+                <a:hlinkClick r:id="rId3"/>
+              </a:rPr>
+              <a:t>cuinotes.com</a:t>
+            </a:r>
+            <a:r>
+              <a:rPr sz="1000">
+                <a:solidFill>
+                  <a:srgbClr val="8A939B"/>
+                </a:solidFill>
+              </a:rPr>
+              <a:t>  ·  15</a:t>
+            </a:r>
           </a:p>
         </p:txBody>
       </p:sp>
@@ -7487,6 +7358,10 @@
             <a:prstDash val="solid"/>
           </a:ln>
         </p:spPr>
+        <p:txBody>
+          <a:bodyPr/>
+          <a:p/>
+        </p:txBody>
       </p:sp>
       <p:sp>
         <p:nvSpPr>
@@ -7568,79 +7443,44 @@
       </p:sp>
       <p:sp>
         <p:nvSpPr>
-          <p:cNvPr id="7" name="Text 5"/>
-          <p:cNvSpPr txBox="1"/>
-          <p:nvPr/>
-        </p:nvSpPr>
-        <p:spPr>
-          <a:xfrm>
-            <a:off x="640080" y="6446520"/>
-            <a:ext cx="8686800" cy="292608"/>
-          </a:xfrm>
-          <a:prstGeom prst="rect">
-            <a:avLst/>
-          </a:prstGeom>
-          <a:noFill/>
-          <a:ln/>
-        </p:spPr>
-        <p:txBody>
-          <a:bodyPr wrap="square" lIns="0" tIns="0" rIns="0" bIns="0" rtlCol="0" anchor="ctr"/>
-          <a:lstStyle/>
-          <a:p>
-            <a:pPr algn="l" indent="0" marL="0">
-              <a:buNone/>
-            </a:pPr>
-            <a:r>
-              <a:rPr lang="en-US" sz="900" dirty="0">
-                <a:solidFill>
-                  <a:srgbClr val="5D5D72"/>
-                </a:solidFill>
-                <a:latin typeface="Calibri" pitchFamily="34" charset="0"/>
-                <a:ea typeface="Calibri" pitchFamily="34" charset="-122"/>
-                <a:cs typeface="Calibri" pitchFamily="34" charset="-120"/>
-              </a:rPr>
-              <a:t>Usman Akram  •  COMSATS University Islamabad</a:t>
-            </a:r>
-            <a:endParaRPr lang="en-US" sz="900" dirty="0"/>
-          </a:p>
-        </p:txBody>
-      </p:sp>
-      <p:sp>
-        <p:nvSpPr>
-          <p:cNvPr id="8" name="Text 6"/>
-          <p:cNvSpPr txBox="1"/>
-          <p:nvPr/>
-        </p:nvSpPr>
-        <p:spPr>
-          <a:xfrm>
-            <a:off x="11155680" y="6446520"/>
-            <a:ext cx="457200" cy="292608"/>
-          </a:xfrm>
-          <a:prstGeom prst="rect">
-            <a:avLst/>
-          </a:prstGeom>
-          <a:noFill/>
-          <a:ln/>
-        </p:spPr>
-        <p:txBody>
-          <a:bodyPr wrap="square" lIns="0" tIns="0" rIns="0" bIns="0" rtlCol="0" anchor="ctr"/>
-          <a:lstStyle/>
-          <a:p>
-            <a:pPr algn="r" indent="0" marL="0">
-              <a:buNone/>
-            </a:pPr>
-            <a:r>
-              <a:rPr lang="en-US" sz="900" dirty="0">
-                <a:solidFill>
-                  <a:srgbClr val="5D5D72"/>
-                </a:solidFill>
-                <a:latin typeface="Calibri" pitchFamily="34" charset="0"/>
-                <a:ea typeface="Calibri" pitchFamily="34" charset="-122"/>
-                <a:cs typeface="Calibri" pitchFamily="34" charset="-120"/>
-              </a:rPr>
-              <a:t>16</a:t>
-            </a:r>
-            <a:endParaRPr lang="en-US" sz="900" dirty="0"/>
+          <p:cNvPr id="9" name="cuinotes-footer-mark"/>
+          <p:cNvSpPr txBox="1"/>
+          <p:nvPr/>
+        </p:nvSpPr>
+        <p:spPr>
+          <a:xfrm>
+            <a:off x="9951720" y="6455664"/>
+            <a:ext cx="2011680" cy="292608"/>
+          </a:xfrm>
+          <a:prstGeom prst="rect">
+            <a:avLst/>
+          </a:prstGeom>
+          <a:noFill/>
+        </p:spPr>
+        <p:txBody>
+          <a:bodyPr wrap="none" lIns="0" rIns="0" tIns="0" bIns="0">
+            <a:spAutoFit/>
+          </a:bodyPr>
+          <a:lstStyle/>
+          <a:p>
+            <a:pPr algn="r"/>
+            <a:r>
+              <a:rPr sz="1000">
+                <a:solidFill>
+                  <a:srgbClr val="8A939B"/>
+                </a:solidFill>
+                <a:hlinkClick r:id="rId3"/>
+              </a:rPr>
+              <a:t>cuinotes.com</a:t>
+            </a:r>
+            <a:r>
+              <a:rPr sz="1000">
+                <a:solidFill>
+                  <a:srgbClr val="8A939B"/>
+                </a:solidFill>
+              </a:rPr>
+              <a:t>  ·  16</a:t>
+            </a:r>
           </a:p>
         </p:txBody>
       </p:sp>
@@ -8476,79 +8316,44 @@
       </p:graphicFrame>
       <p:sp>
         <p:nvSpPr>
-          <p:cNvPr id="5" name="Text 2"/>
-          <p:cNvSpPr txBox="1"/>
-          <p:nvPr/>
-        </p:nvSpPr>
-        <p:spPr>
-          <a:xfrm>
-            <a:off x="640080" y="6446520"/>
-            <a:ext cx="8686800" cy="292608"/>
-          </a:xfrm>
-          <a:prstGeom prst="rect">
-            <a:avLst/>
-          </a:prstGeom>
-          <a:noFill/>
-          <a:ln/>
-        </p:spPr>
-        <p:txBody>
-          <a:bodyPr wrap="square" lIns="0" tIns="0" rIns="0" bIns="0" rtlCol="0" anchor="ctr"/>
-          <a:lstStyle/>
-          <a:p>
-            <a:pPr algn="l" indent="0" marL="0">
-              <a:buNone/>
-            </a:pPr>
-            <a:r>
-              <a:rPr lang="en-US" sz="900" dirty="0">
-                <a:solidFill>
-                  <a:srgbClr val="5D5D72"/>
-                </a:solidFill>
-                <a:latin typeface="Calibri" pitchFamily="34" charset="0"/>
-                <a:ea typeface="Calibri" pitchFamily="34" charset="-122"/>
-                <a:cs typeface="Calibri" pitchFamily="34" charset="-120"/>
-              </a:rPr>
-              <a:t>Usman Akram  •  COMSATS University Islamabad</a:t>
-            </a:r>
-            <a:endParaRPr lang="en-US" sz="900" dirty="0"/>
-          </a:p>
-        </p:txBody>
-      </p:sp>
-      <p:sp>
-        <p:nvSpPr>
-          <p:cNvPr id="6" name="Text 3"/>
-          <p:cNvSpPr txBox="1"/>
-          <p:nvPr/>
-        </p:nvSpPr>
-        <p:spPr>
-          <a:xfrm>
-            <a:off x="11155680" y="6446520"/>
-            <a:ext cx="457200" cy="292608"/>
-          </a:xfrm>
-          <a:prstGeom prst="rect">
-            <a:avLst/>
-          </a:prstGeom>
-          <a:noFill/>
-          <a:ln/>
-        </p:spPr>
-        <p:txBody>
-          <a:bodyPr wrap="square" lIns="0" tIns="0" rIns="0" bIns="0" rtlCol="0" anchor="ctr"/>
-          <a:lstStyle/>
-          <a:p>
-            <a:pPr algn="r" indent="0" marL="0">
-              <a:buNone/>
-            </a:pPr>
-            <a:r>
-              <a:rPr lang="en-US" sz="900" dirty="0">
-                <a:solidFill>
-                  <a:srgbClr val="5D5D72"/>
-                </a:solidFill>
-                <a:latin typeface="Calibri" pitchFamily="34" charset="0"/>
-                <a:ea typeface="Calibri" pitchFamily="34" charset="-122"/>
-                <a:cs typeface="Calibri" pitchFamily="34" charset="-120"/>
-              </a:rPr>
-              <a:t>17</a:t>
-            </a:r>
-            <a:endParaRPr lang="en-US" sz="900" dirty="0"/>
+          <p:cNvPr id="19" name="cuinotes-footer-mark"/>
+          <p:cNvSpPr txBox="1"/>
+          <p:nvPr/>
+        </p:nvSpPr>
+        <p:spPr>
+          <a:xfrm>
+            <a:off x="9951720" y="6455664"/>
+            <a:ext cx="2011680" cy="292608"/>
+          </a:xfrm>
+          <a:prstGeom prst="rect">
+            <a:avLst/>
+          </a:prstGeom>
+          <a:noFill/>
+        </p:spPr>
+        <p:txBody>
+          <a:bodyPr wrap="none" lIns="0" rIns="0" tIns="0" bIns="0">
+            <a:spAutoFit/>
+          </a:bodyPr>
+          <a:lstStyle/>
+          <a:p>
+            <a:pPr algn="r"/>
+            <a:r>
+              <a:rPr sz="1000">
+                <a:solidFill>
+                  <a:srgbClr val="8A939B"/>
+                </a:solidFill>
+                <a:hlinkClick r:id="rId3"/>
+              </a:rPr>
+              <a:t>cuinotes.com</a:t>
+            </a:r>
+            <a:r>
+              <a:rPr sz="1000">
+                <a:solidFill>
+                  <a:srgbClr val="8A939B"/>
+                </a:solidFill>
+              </a:rPr>
+              <a:t>  ·  17</a:t>
+            </a:r>
           </a:p>
         </p:txBody>
       </p:sp>
@@ -8683,6 +8488,10 @@
           </a:solidFill>
           <a:ln/>
         </p:spPr>
+        <p:txBody>
+          <a:bodyPr/>
+          <a:p/>
+        </p:txBody>
       </p:sp>
       <p:sp>
         <p:nvSpPr>
@@ -8797,79 +8606,44 @@
       </p:sp>
       <p:sp>
         <p:nvSpPr>
-          <p:cNvPr id="6" name="Text 4"/>
-          <p:cNvSpPr txBox="1"/>
-          <p:nvPr/>
-        </p:nvSpPr>
-        <p:spPr>
-          <a:xfrm>
-            <a:off x="640080" y="6446520"/>
-            <a:ext cx="8686800" cy="292608"/>
-          </a:xfrm>
-          <a:prstGeom prst="rect">
-            <a:avLst/>
-          </a:prstGeom>
-          <a:noFill/>
-          <a:ln/>
-        </p:spPr>
-        <p:txBody>
-          <a:bodyPr wrap="square" lIns="0" tIns="0" rIns="0" bIns="0" rtlCol="0" anchor="ctr"/>
-          <a:lstStyle/>
-          <a:p>
-            <a:pPr algn="l" indent="0" marL="0">
-              <a:buNone/>
-            </a:pPr>
-            <a:r>
-              <a:rPr lang="en-US" sz="900" dirty="0">
-                <a:solidFill>
-                  <a:srgbClr val="5D5D72"/>
-                </a:solidFill>
-                <a:latin typeface="Calibri" pitchFamily="34" charset="0"/>
-                <a:ea typeface="Calibri" pitchFamily="34" charset="-122"/>
-                <a:cs typeface="Calibri" pitchFamily="34" charset="-120"/>
-              </a:rPr>
-              <a:t>Usman Akram  •  COMSATS University Islamabad</a:t>
-            </a:r>
-            <a:endParaRPr lang="en-US" sz="900" dirty="0"/>
-          </a:p>
-        </p:txBody>
-      </p:sp>
-      <p:sp>
-        <p:nvSpPr>
-          <p:cNvPr id="7" name="Text 5"/>
-          <p:cNvSpPr txBox="1"/>
-          <p:nvPr/>
-        </p:nvSpPr>
-        <p:spPr>
-          <a:xfrm>
-            <a:off x="11155680" y="6446520"/>
-            <a:ext cx="457200" cy="292608"/>
-          </a:xfrm>
-          <a:prstGeom prst="rect">
-            <a:avLst/>
-          </a:prstGeom>
-          <a:noFill/>
-          <a:ln/>
-        </p:spPr>
-        <p:txBody>
-          <a:bodyPr wrap="square" lIns="0" tIns="0" rIns="0" bIns="0" rtlCol="0" anchor="ctr"/>
-          <a:lstStyle/>
-          <a:p>
-            <a:pPr algn="r" indent="0" marL="0">
-              <a:buNone/>
-            </a:pPr>
-            <a:r>
-              <a:rPr lang="en-US" sz="900" dirty="0">
-                <a:solidFill>
-                  <a:srgbClr val="5D5D72"/>
-                </a:solidFill>
-                <a:latin typeface="Calibri" pitchFamily="34" charset="0"/>
-                <a:ea typeface="Calibri" pitchFamily="34" charset="-122"/>
-                <a:cs typeface="Calibri" pitchFamily="34" charset="-120"/>
-              </a:rPr>
-              <a:t>18</a:t>
-            </a:r>
-            <a:endParaRPr lang="en-US" sz="900" dirty="0"/>
+          <p:cNvPr id="8" name="cuinotes-footer-mark"/>
+          <p:cNvSpPr txBox="1"/>
+          <p:nvPr/>
+        </p:nvSpPr>
+        <p:spPr>
+          <a:xfrm>
+            <a:off x="9951720" y="6455664"/>
+            <a:ext cx="2011680" cy="292608"/>
+          </a:xfrm>
+          <a:prstGeom prst="rect">
+            <a:avLst/>
+          </a:prstGeom>
+          <a:noFill/>
+        </p:spPr>
+        <p:txBody>
+          <a:bodyPr wrap="none" lIns="0" rIns="0" tIns="0" bIns="0">
+            <a:spAutoFit/>
+          </a:bodyPr>
+          <a:lstStyle/>
+          <a:p>
+            <a:pPr algn="r"/>
+            <a:r>
+              <a:rPr sz="1000">
+                <a:solidFill>
+                  <a:srgbClr val="8A939B"/>
+                </a:solidFill>
+                <a:hlinkClick r:id="rId3"/>
+              </a:rPr>
+              <a:t>cuinotes.com</a:t>
+            </a:r>
+            <a:r>
+              <a:rPr sz="1000">
+                <a:solidFill>
+                  <a:srgbClr val="8A939B"/>
+                </a:solidFill>
+              </a:rPr>
+              <a:t>  ·  18</a:t>
+            </a:r>
           </a:p>
         </p:txBody>
       </p:sp>
@@ -9009,6 +8783,10 @@
             <a:prstDash val="solid"/>
           </a:ln>
         </p:spPr>
+        <p:txBody>
+          <a:bodyPr/>
+          <a:p/>
+        </p:txBody>
       </p:sp>
       <p:sp>
         <p:nvSpPr>
@@ -9160,6 +8938,10 @@
             <a:prstDash val="solid"/>
           </a:ln>
         </p:spPr>
+        <p:txBody>
+          <a:bodyPr/>
+          <a:p/>
+        </p:txBody>
       </p:sp>
       <p:sp>
         <p:nvSpPr>
@@ -9287,79 +9069,44 @@
       </p:sp>
       <p:sp>
         <p:nvSpPr>
-          <p:cNvPr id="10" name="Text 8"/>
-          <p:cNvSpPr txBox="1"/>
-          <p:nvPr/>
-        </p:nvSpPr>
-        <p:spPr>
-          <a:xfrm>
-            <a:off x="640080" y="6446520"/>
-            <a:ext cx="8686800" cy="292608"/>
-          </a:xfrm>
-          <a:prstGeom prst="rect">
-            <a:avLst/>
-          </a:prstGeom>
-          <a:noFill/>
-          <a:ln/>
-        </p:spPr>
-        <p:txBody>
-          <a:bodyPr wrap="square" lIns="0" tIns="0" rIns="0" bIns="0" rtlCol="0" anchor="ctr"/>
-          <a:lstStyle/>
-          <a:p>
-            <a:pPr algn="l" indent="0" marL="0">
-              <a:buNone/>
-            </a:pPr>
-            <a:r>
-              <a:rPr lang="en-US" sz="900" dirty="0">
-                <a:solidFill>
-                  <a:srgbClr val="5D5D72"/>
-                </a:solidFill>
-                <a:latin typeface="Calibri" pitchFamily="34" charset="0"/>
-                <a:ea typeface="Calibri" pitchFamily="34" charset="-122"/>
-                <a:cs typeface="Calibri" pitchFamily="34" charset="-120"/>
-              </a:rPr>
-              <a:t>Usman Akram  •  COMSATS University Islamabad</a:t>
-            </a:r>
-            <a:endParaRPr lang="en-US" sz="900" dirty="0"/>
-          </a:p>
-        </p:txBody>
-      </p:sp>
-      <p:sp>
-        <p:nvSpPr>
-          <p:cNvPr id="11" name="Text 9"/>
-          <p:cNvSpPr txBox="1"/>
-          <p:nvPr/>
-        </p:nvSpPr>
-        <p:spPr>
-          <a:xfrm>
-            <a:off x="11155680" y="6446520"/>
-            <a:ext cx="457200" cy="292608"/>
-          </a:xfrm>
-          <a:prstGeom prst="rect">
-            <a:avLst/>
-          </a:prstGeom>
-          <a:noFill/>
-          <a:ln/>
-        </p:spPr>
-        <p:txBody>
-          <a:bodyPr wrap="square" lIns="0" tIns="0" rIns="0" bIns="0" rtlCol="0" anchor="ctr"/>
-          <a:lstStyle/>
-          <a:p>
-            <a:pPr algn="r" indent="0" marL="0">
-              <a:buNone/>
-            </a:pPr>
-            <a:r>
-              <a:rPr lang="en-US" sz="900" dirty="0">
-                <a:solidFill>
-                  <a:srgbClr val="5D5D72"/>
-                </a:solidFill>
-                <a:latin typeface="Calibri" pitchFamily="34" charset="0"/>
-                <a:ea typeface="Calibri" pitchFamily="34" charset="-122"/>
-                <a:cs typeface="Calibri" pitchFamily="34" charset="-120"/>
-              </a:rPr>
-              <a:t>19</a:t>
-            </a:r>
-            <a:endParaRPr lang="en-US" sz="900" dirty="0"/>
+          <p:cNvPr id="12" name="cuinotes-footer-mark"/>
+          <p:cNvSpPr txBox="1"/>
+          <p:nvPr/>
+        </p:nvSpPr>
+        <p:spPr>
+          <a:xfrm>
+            <a:off x="9951720" y="6455664"/>
+            <a:ext cx="2011680" cy="292608"/>
+          </a:xfrm>
+          <a:prstGeom prst="rect">
+            <a:avLst/>
+          </a:prstGeom>
+          <a:noFill/>
+        </p:spPr>
+        <p:txBody>
+          <a:bodyPr wrap="none" lIns="0" rIns="0" tIns="0" bIns="0">
+            <a:spAutoFit/>
+          </a:bodyPr>
+          <a:lstStyle/>
+          <a:p>
+            <a:pPr algn="r"/>
+            <a:r>
+              <a:rPr sz="1000">
+                <a:solidFill>
+                  <a:srgbClr val="8A939B"/>
+                </a:solidFill>
+                <a:hlinkClick r:id="rId3"/>
+              </a:rPr>
+              <a:t>cuinotes.com</a:t>
+            </a:r>
+            <a:r>
+              <a:rPr sz="1000">
+                <a:solidFill>
+                  <a:srgbClr val="8A939B"/>
+                </a:solidFill>
+              </a:rPr>
+              <a:t>  ·  19</a:t>
+            </a:r>
           </a:p>
         </p:txBody>
       </p:sp>
@@ -9492,6 +9239,10 @@
           </a:solidFill>
           <a:ln/>
         </p:spPr>
+        <p:txBody>
+          <a:bodyPr/>
+          <a:p/>
+        </p:txBody>
       </p:sp>
       <p:sp>
         <p:nvSpPr>
@@ -9590,6 +9341,10 @@
           </a:solidFill>
           <a:ln/>
         </p:spPr>
+        <p:txBody>
+          <a:bodyPr/>
+          <a:p/>
+        </p:txBody>
       </p:sp>
       <p:sp>
         <p:nvSpPr>
@@ -9688,6 +9443,10 @@
           </a:solidFill>
           <a:ln/>
         </p:spPr>
+        <p:txBody>
+          <a:bodyPr/>
+          <a:p/>
+        </p:txBody>
       </p:sp>
       <p:sp>
         <p:nvSpPr>
@@ -9786,6 +9545,10 @@
           </a:solidFill>
           <a:ln/>
         </p:spPr>
+        <p:txBody>
+          <a:bodyPr/>
+          <a:p/>
+        </p:txBody>
       </p:sp>
       <p:sp>
         <p:nvSpPr>
@@ -9884,6 +9647,10 @@
           </a:solidFill>
           <a:ln/>
         </p:spPr>
+        <p:txBody>
+          <a:bodyPr/>
+          <a:p/>
+        </p:txBody>
       </p:sp>
       <p:sp>
         <p:nvSpPr>
@@ -9965,79 +9732,44 @@
       </p:sp>
       <p:sp>
         <p:nvSpPr>
-          <p:cNvPr id="19" name="Text 17"/>
-          <p:cNvSpPr txBox="1"/>
-          <p:nvPr/>
-        </p:nvSpPr>
-        <p:spPr>
-          <a:xfrm>
-            <a:off x="640080" y="6446520"/>
-            <a:ext cx="8686800" cy="292608"/>
-          </a:xfrm>
-          <a:prstGeom prst="rect">
-            <a:avLst/>
-          </a:prstGeom>
-          <a:noFill/>
-          <a:ln/>
-        </p:spPr>
-        <p:txBody>
-          <a:bodyPr wrap="square" lIns="0" tIns="0" rIns="0" bIns="0" rtlCol="0" anchor="ctr"/>
-          <a:lstStyle/>
-          <a:p>
-            <a:pPr algn="l" indent="0" marL="0">
-              <a:buNone/>
-            </a:pPr>
-            <a:r>
-              <a:rPr lang="en-US" sz="900" dirty="0">
-                <a:solidFill>
-                  <a:srgbClr val="5D5D72"/>
-                </a:solidFill>
-                <a:latin typeface="Calibri" pitchFamily="34" charset="0"/>
-                <a:ea typeface="Calibri" pitchFamily="34" charset="-122"/>
-                <a:cs typeface="Calibri" pitchFamily="34" charset="-120"/>
-              </a:rPr>
-              <a:t>Usman Akram  •  COMSATS University Islamabad</a:t>
-            </a:r>
-            <a:endParaRPr lang="en-US" sz="900" dirty="0"/>
-          </a:p>
-        </p:txBody>
-      </p:sp>
-      <p:sp>
-        <p:nvSpPr>
-          <p:cNvPr id="20" name="Text 18"/>
-          <p:cNvSpPr txBox="1"/>
-          <p:nvPr/>
-        </p:nvSpPr>
-        <p:spPr>
-          <a:xfrm>
-            <a:off x="11155680" y="6446520"/>
-            <a:ext cx="457200" cy="292608"/>
-          </a:xfrm>
-          <a:prstGeom prst="rect">
-            <a:avLst/>
-          </a:prstGeom>
-          <a:noFill/>
-          <a:ln/>
-        </p:spPr>
-        <p:txBody>
-          <a:bodyPr wrap="square" lIns="0" tIns="0" rIns="0" bIns="0" rtlCol="0" anchor="ctr"/>
-          <a:lstStyle/>
-          <a:p>
-            <a:pPr algn="r" indent="0" marL="0">
-              <a:buNone/>
-            </a:pPr>
-            <a:r>
-              <a:rPr lang="en-US" sz="900" dirty="0">
-                <a:solidFill>
-                  <a:srgbClr val="5D5D72"/>
-                </a:solidFill>
-                <a:latin typeface="Calibri" pitchFamily="34" charset="0"/>
-                <a:ea typeface="Calibri" pitchFamily="34" charset="-122"/>
-                <a:cs typeface="Calibri" pitchFamily="34" charset="-120"/>
-              </a:rPr>
-              <a:t>2</a:t>
-            </a:r>
-            <a:endParaRPr lang="en-US" sz="900" dirty="0"/>
+          <p:cNvPr id="21" name="cuinotes-footer-mark"/>
+          <p:cNvSpPr txBox="1"/>
+          <p:nvPr/>
+        </p:nvSpPr>
+        <p:spPr>
+          <a:xfrm>
+            <a:off x="9951720" y="6455664"/>
+            <a:ext cx="2011680" cy="292608"/>
+          </a:xfrm>
+          <a:prstGeom prst="rect">
+            <a:avLst/>
+          </a:prstGeom>
+          <a:noFill/>
+        </p:spPr>
+        <p:txBody>
+          <a:bodyPr wrap="none" lIns="0" rIns="0" tIns="0" bIns="0">
+            <a:spAutoFit/>
+          </a:bodyPr>
+          <a:lstStyle/>
+          <a:p>
+            <a:pPr algn="r"/>
+            <a:r>
+              <a:rPr sz="1000">
+                <a:solidFill>
+                  <a:srgbClr val="8A939B"/>
+                </a:solidFill>
+                <a:hlinkClick r:id="rId3"/>
+              </a:rPr>
+              <a:t>cuinotes.com</a:t>
+            </a:r>
+            <a:r>
+              <a:rPr sz="1000">
+                <a:solidFill>
+                  <a:srgbClr val="8A939B"/>
+                </a:solidFill>
+              </a:rPr>
+              <a:t>  ·  2</a:t>
+            </a:r>
           </a:p>
         </p:txBody>
       </p:sp>
@@ -10174,6 +9906,10 @@
             <a:tailEnd type="triangle"/>
           </a:ln>
         </p:spPr>
+        <p:txBody>
+          <a:bodyPr/>
+          <a:p/>
+        </p:txBody>
       </p:sp>
       <p:sp>
         <p:nvSpPr>
@@ -10198,6 +9934,10 @@
             <a:tailEnd type="triangle"/>
           </a:ln>
         </p:spPr>
+        <p:txBody>
+          <a:bodyPr/>
+          <a:p/>
+        </p:txBody>
       </p:sp>
       <p:sp>
         <p:nvSpPr>
@@ -10263,6 +10003,10 @@
             <a:tailEnd type="triangle"/>
           </a:ln>
         </p:spPr>
+        <p:txBody>
+          <a:bodyPr/>
+          <a:p/>
+        </p:txBody>
       </p:sp>
       <p:sp>
         <p:nvSpPr>
@@ -10328,6 +10072,10 @@
             <a:tailEnd type="triangle"/>
           </a:ln>
         </p:spPr>
+        <p:txBody>
+          <a:bodyPr/>
+          <a:p/>
+        </p:txBody>
       </p:sp>
       <p:sp>
         <p:nvSpPr>
@@ -10393,6 +10141,10 @@
             <a:tailEnd type="triangle"/>
           </a:ln>
         </p:spPr>
+        <p:txBody>
+          <a:bodyPr/>
+          <a:p/>
+        </p:txBody>
       </p:sp>
       <p:sp>
         <p:nvSpPr>
@@ -10454,6 +10206,10 @@
           </a:solidFill>
           <a:ln/>
         </p:spPr>
+        <p:txBody>
+          <a:bodyPr/>
+          <a:p/>
+        </p:txBody>
       </p:sp>
       <p:sp>
         <p:nvSpPr>
@@ -10536,6 +10292,10 @@
           </a:solidFill>
           <a:ln/>
         </p:spPr>
+        <p:txBody>
+          <a:bodyPr/>
+          <a:p/>
+        </p:txBody>
       </p:sp>
       <p:sp>
         <p:nvSpPr>
@@ -10618,6 +10378,10 @@
           </a:solidFill>
           <a:ln/>
         </p:spPr>
+        <p:txBody>
+          <a:bodyPr/>
+          <a:p/>
+        </p:txBody>
       </p:sp>
       <p:sp>
         <p:nvSpPr>
@@ -10680,6 +10444,10 @@
           </a:solidFill>
           <a:ln/>
         </p:spPr>
+        <p:txBody>
+          <a:bodyPr/>
+          <a:p/>
+        </p:txBody>
       </p:sp>
       <p:sp>
         <p:nvSpPr>
@@ -10782,6 +10550,10 @@
           </a:solidFill>
           <a:ln/>
         </p:spPr>
+        <p:txBody>
+          <a:bodyPr/>
+          <a:p/>
+        </p:txBody>
       </p:sp>
       <p:sp>
         <p:nvSpPr>
@@ -10844,6 +10616,10 @@
           </a:solidFill>
           <a:ln/>
         </p:spPr>
+        <p:txBody>
+          <a:bodyPr/>
+          <a:p/>
+        </p:txBody>
       </p:sp>
       <p:sp>
         <p:nvSpPr>
@@ -10948,79 +10724,44 @@
       </p:sp>
       <p:sp>
         <p:nvSpPr>
-          <p:cNvPr id="26" name="Text 24"/>
-          <p:cNvSpPr txBox="1"/>
-          <p:nvPr/>
-        </p:nvSpPr>
-        <p:spPr>
-          <a:xfrm>
-            <a:off x="640080" y="6446520"/>
-            <a:ext cx="8686800" cy="292608"/>
-          </a:xfrm>
-          <a:prstGeom prst="rect">
-            <a:avLst/>
-          </a:prstGeom>
-          <a:noFill/>
-          <a:ln/>
-        </p:spPr>
-        <p:txBody>
-          <a:bodyPr wrap="square" lIns="0" tIns="0" rIns="0" bIns="0" rtlCol="0" anchor="ctr"/>
-          <a:lstStyle/>
-          <a:p>
-            <a:pPr algn="l" indent="0" marL="0">
-              <a:buNone/>
-            </a:pPr>
-            <a:r>
-              <a:rPr lang="en-US" sz="900" dirty="0">
-                <a:solidFill>
-                  <a:srgbClr val="5D5D72"/>
-                </a:solidFill>
-                <a:latin typeface="Calibri" pitchFamily="34" charset="0"/>
-                <a:ea typeface="Calibri" pitchFamily="34" charset="-122"/>
-                <a:cs typeface="Calibri" pitchFamily="34" charset="-120"/>
-              </a:rPr>
-              <a:t>Usman Akram  •  COMSATS University Islamabad</a:t>
-            </a:r>
-            <a:endParaRPr lang="en-US" sz="900" dirty="0"/>
-          </a:p>
-        </p:txBody>
-      </p:sp>
-      <p:sp>
-        <p:nvSpPr>
-          <p:cNvPr id="27" name="Text 25"/>
-          <p:cNvSpPr txBox="1"/>
-          <p:nvPr/>
-        </p:nvSpPr>
-        <p:spPr>
-          <a:xfrm>
-            <a:off x="11155680" y="6446520"/>
-            <a:ext cx="457200" cy="292608"/>
-          </a:xfrm>
-          <a:prstGeom prst="rect">
-            <a:avLst/>
-          </a:prstGeom>
-          <a:noFill/>
-          <a:ln/>
-        </p:spPr>
-        <p:txBody>
-          <a:bodyPr wrap="square" lIns="0" tIns="0" rIns="0" bIns="0" rtlCol="0" anchor="ctr"/>
-          <a:lstStyle/>
-          <a:p>
-            <a:pPr algn="r" indent="0" marL="0">
-              <a:buNone/>
-            </a:pPr>
-            <a:r>
-              <a:rPr lang="en-US" sz="900" dirty="0">
-                <a:solidFill>
-                  <a:srgbClr val="5D5D72"/>
-                </a:solidFill>
-                <a:latin typeface="Calibri" pitchFamily="34" charset="0"/>
-                <a:ea typeface="Calibri" pitchFamily="34" charset="-122"/>
-                <a:cs typeface="Calibri" pitchFamily="34" charset="-120"/>
-              </a:rPr>
-              <a:t>20</a:t>
-            </a:r>
-            <a:endParaRPr lang="en-US" sz="900" dirty="0"/>
+          <p:cNvPr id="28" name="cuinotes-footer-mark"/>
+          <p:cNvSpPr txBox="1"/>
+          <p:nvPr/>
+        </p:nvSpPr>
+        <p:spPr>
+          <a:xfrm>
+            <a:off x="9951720" y="6455664"/>
+            <a:ext cx="2011680" cy="292608"/>
+          </a:xfrm>
+          <a:prstGeom prst="rect">
+            <a:avLst/>
+          </a:prstGeom>
+          <a:noFill/>
+        </p:spPr>
+        <p:txBody>
+          <a:bodyPr wrap="none" lIns="0" rIns="0" tIns="0" bIns="0">
+            <a:spAutoFit/>
+          </a:bodyPr>
+          <a:lstStyle/>
+          <a:p>
+            <a:pPr algn="r"/>
+            <a:r>
+              <a:rPr sz="1000">
+                <a:solidFill>
+                  <a:srgbClr val="8A939B"/>
+                </a:solidFill>
+                <a:hlinkClick r:id="rId3"/>
+              </a:rPr>
+              <a:t>cuinotes.com</a:t>
+            </a:r>
+            <a:r>
+              <a:rPr sz="1000">
+                <a:solidFill>
+                  <a:srgbClr val="8A939B"/>
+                </a:solidFill>
+              </a:rPr>
+              <a:t>  ·  20</a:t>
+            </a:r>
           </a:p>
         </p:txBody>
       </p:sp>
@@ -11160,6 +10901,10 @@
             <a:prstDash val="solid"/>
           </a:ln>
         </p:spPr>
+        <p:txBody>
+          <a:bodyPr/>
+          <a:p/>
+        </p:txBody>
       </p:sp>
       <p:sp>
         <p:nvSpPr>
@@ -11280,79 +11025,44 @@
       </p:sp>
       <p:sp>
         <p:nvSpPr>
-          <p:cNvPr id="8" name="Text 6"/>
-          <p:cNvSpPr txBox="1"/>
-          <p:nvPr/>
-        </p:nvSpPr>
-        <p:spPr>
-          <a:xfrm>
-            <a:off x="640080" y="6446520"/>
-            <a:ext cx="8686800" cy="292608"/>
-          </a:xfrm>
-          <a:prstGeom prst="rect">
-            <a:avLst/>
-          </a:prstGeom>
-          <a:noFill/>
-          <a:ln/>
-        </p:spPr>
-        <p:txBody>
-          <a:bodyPr wrap="square" lIns="0" tIns="0" rIns="0" bIns="0" rtlCol="0" anchor="ctr"/>
-          <a:lstStyle/>
-          <a:p>
-            <a:pPr algn="l" indent="0" marL="0">
-              <a:buNone/>
-            </a:pPr>
-            <a:r>
-              <a:rPr lang="en-US" sz="900" dirty="0">
-                <a:solidFill>
-                  <a:srgbClr val="5D5D72"/>
-                </a:solidFill>
-                <a:latin typeface="Calibri" pitchFamily="34" charset="0"/>
-                <a:ea typeface="Calibri" pitchFamily="34" charset="-122"/>
-                <a:cs typeface="Calibri" pitchFamily="34" charset="-120"/>
-              </a:rPr>
-              <a:t>Usman Akram  •  COMSATS University Islamabad</a:t>
-            </a:r>
-            <a:endParaRPr lang="en-US" sz="900" dirty="0"/>
-          </a:p>
-        </p:txBody>
-      </p:sp>
-      <p:sp>
-        <p:nvSpPr>
-          <p:cNvPr id="9" name="Text 7"/>
-          <p:cNvSpPr txBox="1"/>
-          <p:nvPr/>
-        </p:nvSpPr>
-        <p:spPr>
-          <a:xfrm>
-            <a:off x="11155680" y="6446520"/>
-            <a:ext cx="457200" cy="292608"/>
-          </a:xfrm>
-          <a:prstGeom prst="rect">
-            <a:avLst/>
-          </a:prstGeom>
-          <a:noFill/>
-          <a:ln/>
-        </p:spPr>
-        <p:txBody>
-          <a:bodyPr wrap="square" lIns="0" tIns="0" rIns="0" bIns="0" rtlCol="0" anchor="ctr"/>
-          <a:lstStyle/>
-          <a:p>
-            <a:pPr algn="r" indent="0" marL="0">
-              <a:buNone/>
-            </a:pPr>
-            <a:r>
-              <a:rPr lang="en-US" sz="900" dirty="0">
-                <a:solidFill>
-                  <a:srgbClr val="5D5D72"/>
-                </a:solidFill>
-                <a:latin typeface="Calibri" pitchFamily="34" charset="0"/>
-                <a:ea typeface="Calibri" pitchFamily="34" charset="-122"/>
-                <a:cs typeface="Calibri" pitchFamily="34" charset="-120"/>
-              </a:rPr>
-              <a:t>21</a:t>
-            </a:r>
-            <a:endParaRPr lang="en-US" sz="900" dirty="0"/>
+          <p:cNvPr id="10" name="cuinotes-footer-mark"/>
+          <p:cNvSpPr txBox="1"/>
+          <p:nvPr/>
+        </p:nvSpPr>
+        <p:spPr>
+          <a:xfrm>
+            <a:off x="9951720" y="6455664"/>
+            <a:ext cx="2011680" cy="292608"/>
+          </a:xfrm>
+          <a:prstGeom prst="rect">
+            <a:avLst/>
+          </a:prstGeom>
+          <a:noFill/>
+        </p:spPr>
+        <p:txBody>
+          <a:bodyPr wrap="none" lIns="0" rIns="0" tIns="0" bIns="0">
+            <a:spAutoFit/>
+          </a:bodyPr>
+          <a:lstStyle/>
+          <a:p>
+            <a:pPr algn="r"/>
+            <a:r>
+              <a:rPr sz="1000">
+                <a:solidFill>
+                  <a:srgbClr val="8A939B"/>
+                </a:solidFill>
+                <a:hlinkClick r:id="rId3"/>
+              </a:rPr>
+              <a:t>cuinotes.com</a:t>
+            </a:r>
+            <a:r>
+              <a:rPr sz="1000">
+                <a:solidFill>
+                  <a:srgbClr val="8A939B"/>
+                </a:solidFill>
+              </a:rPr>
+              <a:t>  ·  21</a:t>
+            </a:r>
           </a:p>
         </p:txBody>
       </p:sp>
@@ -11485,6 +11195,10 @@
           </a:solidFill>
           <a:ln/>
         </p:spPr>
+        <p:txBody>
+          <a:bodyPr/>
+          <a:p/>
+        </p:txBody>
       </p:sp>
       <p:sp>
         <p:nvSpPr>
@@ -11583,6 +11297,10 @@
           </a:solidFill>
           <a:ln/>
         </p:spPr>
+        <p:txBody>
+          <a:bodyPr/>
+          <a:p/>
+        </p:txBody>
       </p:sp>
       <p:sp>
         <p:nvSpPr>
@@ -11681,6 +11399,10 @@
           </a:solidFill>
           <a:ln/>
         </p:spPr>
+        <p:txBody>
+          <a:bodyPr/>
+          <a:p/>
+        </p:txBody>
       </p:sp>
       <p:sp>
         <p:nvSpPr>
@@ -11762,79 +11484,44 @@
       </p:sp>
       <p:sp>
         <p:nvSpPr>
-          <p:cNvPr id="13" name="Text 11"/>
-          <p:cNvSpPr txBox="1"/>
-          <p:nvPr/>
-        </p:nvSpPr>
-        <p:spPr>
-          <a:xfrm>
-            <a:off x="640080" y="6446520"/>
-            <a:ext cx="8686800" cy="292608"/>
-          </a:xfrm>
-          <a:prstGeom prst="rect">
-            <a:avLst/>
-          </a:prstGeom>
-          <a:noFill/>
-          <a:ln/>
-        </p:spPr>
-        <p:txBody>
-          <a:bodyPr wrap="square" lIns="0" tIns="0" rIns="0" bIns="0" rtlCol="0" anchor="ctr"/>
-          <a:lstStyle/>
-          <a:p>
-            <a:pPr algn="l" indent="0" marL="0">
-              <a:buNone/>
-            </a:pPr>
-            <a:r>
-              <a:rPr lang="en-US" sz="900" dirty="0">
-                <a:solidFill>
-                  <a:srgbClr val="5D5D72"/>
-                </a:solidFill>
-                <a:latin typeface="Calibri" pitchFamily="34" charset="0"/>
-                <a:ea typeface="Calibri" pitchFamily="34" charset="-122"/>
-                <a:cs typeface="Calibri" pitchFamily="34" charset="-120"/>
-              </a:rPr>
-              <a:t>Usman Akram  •  COMSATS University Islamabad</a:t>
-            </a:r>
-            <a:endParaRPr lang="en-US" sz="900" dirty="0"/>
-          </a:p>
-        </p:txBody>
-      </p:sp>
-      <p:sp>
-        <p:nvSpPr>
-          <p:cNvPr id="14" name="Text 12"/>
-          <p:cNvSpPr txBox="1"/>
-          <p:nvPr/>
-        </p:nvSpPr>
-        <p:spPr>
-          <a:xfrm>
-            <a:off x="11155680" y="6446520"/>
-            <a:ext cx="457200" cy="292608"/>
-          </a:xfrm>
-          <a:prstGeom prst="rect">
-            <a:avLst/>
-          </a:prstGeom>
-          <a:noFill/>
-          <a:ln/>
-        </p:spPr>
-        <p:txBody>
-          <a:bodyPr wrap="square" lIns="0" tIns="0" rIns="0" bIns="0" rtlCol="0" anchor="ctr"/>
-          <a:lstStyle/>
-          <a:p>
-            <a:pPr algn="r" indent="0" marL="0">
-              <a:buNone/>
-            </a:pPr>
-            <a:r>
-              <a:rPr lang="en-US" sz="900" dirty="0">
-                <a:solidFill>
-                  <a:srgbClr val="5D5D72"/>
-                </a:solidFill>
-                <a:latin typeface="Calibri" pitchFamily="34" charset="0"/>
-                <a:ea typeface="Calibri" pitchFamily="34" charset="-122"/>
-                <a:cs typeface="Calibri" pitchFamily="34" charset="-120"/>
-              </a:rPr>
-              <a:t>22</a:t>
-            </a:r>
-            <a:endParaRPr lang="en-US" sz="900" dirty="0"/>
+          <p:cNvPr id="15" name="cuinotes-footer-mark"/>
+          <p:cNvSpPr txBox="1"/>
+          <p:nvPr/>
+        </p:nvSpPr>
+        <p:spPr>
+          <a:xfrm>
+            <a:off x="9951720" y="6455664"/>
+            <a:ext cx="2011680" cy="292608"/>
+          </a:xfrm>
+          <a:prstGeom prst="rect">
+            <a:avLst/>
+          </a:prstGeom>
+          <a:noFill/>
+        </p:spPr>
+        <p:txBody>
+          <a:bodyPr wrap="none" lIns="0" rIns="0" tIns="0" bIns="0">
+            <a:spAutoFit/>
+          </a:bodyPr>
+          <a:lstStyle/>
+          <a:p>
+            <a:pPr algn="r"/>
+            <a:r>
+              <a:rPr sz="1000">
+                <a:solidFill>
+                  <a:srgbClr val="8A939B"/>
+                </a:solidFill>
+                <a:hlinkClick r:id="rId3"/>
+              </a:rPr>
+              <a:t>cuinotes.com</a:t>
+            </a:r>
+            <a:r>
+              <a:rPr sz="1000">
+                <a:solidFill>
+                  <a:srgbClr val="8A939B"/>
+                </a:solidFill>
+              </a:rPr>
+              <a:t>  ·  22</a:t>
+            </a:r>
           </a:p>
         </p:txBody>
       </p:sp>
@@ -11969,6 +11656,10 @@
           </a:solidFill>
           <a:ln/>
         </p:spPr>
+        <p:txBody>
+          <a:bodyPr/>
+          <a:p/>
+        </p:txBody>
       </p:sp>
       <p:sp>
         <p:nvSpPr>
@@ -12280,79 +11971,44 @@
       </p:sp>
       <p:sp>
         <p:nvSpPr>
-          <p:cNvPr id="7" name="Text 5"/>
-          <p:cNvSpPr txBox="1"/>
-          <p:nvPr/>
-        </p:nvSpPr>
-        <p:spPr>
-          <a:xfrm>
-            <a:off x="640080" y="6446520"/>
-            <a:ext cx="8686800" cy="292608"/>
-          </a:xfrm>
-          <a:prstGeom prst="rect">
-            <a:avLst/>
-          </a:prstGeom>
-          <a:noFill/>
-          <a:ln/>
-        </p:spPr>
-        <p:txBody>
-          <a:bodyPr wrap="square" lIns="0" tIns="0" rIns="0" bIns="0" rtlCol="0" anchor="ctr"/>
-          <a:lstStyle/>
-          <a:p>
-            <a:pPr algn="l" indent="0" marL="0">
-              <a:buNone/>
-            </a:pPr>
-            <a:r>
-              <a:rPr lang="en-US" sz="900" dirty="0">
-                <a:solidFill>
-                  <a:srgbClr val="5D5D72"/>
-                </a:solidFill>
-                <a:latin typeface="Calibri" pitchFamily="34" charset="0"/>
-                <a:ea typeface="Calibri" pitchFamily="34" charset="-122"/>
-                <a:cs typeface="Calibri" pitchFamily="34" charset="-120"/>
-              </a:rPr>
-              <a:t>Usman Akram  •  COMSATS University Islamabad</a:t>
-            </a:r>
-            <a:endParaRPr lang="en-US" sz="900" dirty="0"/>
-          </a:p>
-        </p:txBody>
-      </p:sp>
-      <p:sp>
-        <p:nvSpPr>
-          <p:cNvPr id="8" name="Text 6"/>
-          <p:cNvSpPr txBox="1"/>
-          <p:nvPr/>
-        </p:nvSpPr>
-        <p:spPr>
-          <a:xfrm>
-            <a:off x="11155680" y="6446520"/>
-            <a:ext cx="457200" cy="292608"/>
-          </a:xfrm>
-          <a:prstGeom prst="rect">
-            <a:avLst/>
-          </a:prstGeom>
-          <a:noFill/>
-          <a:ln/>
-        </p:spPr>
-        <p:txBody>
-          <a:bodyPr wrap="square" lIns="0" tIns="0" rIns="0" bIns="0" rtlCol="0" anchor="ctr"/>
-          <a:lstStyle/>
-          <a:p>
-            <a:pPr algn="r" indent="0" marL="0">
-              <a:buNone/>
-            </a:pPr>
-            <a:r>
-              <a:rPr lang="en-US" sz="900" dirty="0">
-                <a:solidFill>
-                  <a:srgbClr val="5D5D72"/>
-                </a:solidFill>
-                <a:latin typeface="Calibri" pitchFamily="34" charset="0"/>
-                <a:ea typeface="Calibri" pitchFamily="34" charset="-122"/>
-                <a:cs typeface="Calibri" pitchFamily="34" charset="-120"/>
-              </a:rPr>
-              <a:t>23</a:t>
-            </a:r>
-            <a:endParaRPr lang="en-US" sz="900" dirty="0"/>
+          <p:cNvPr id="9" name="cuinotes-footer-mark"/>
+          <p:cNvSpPr txBox="1"/>
+          <p:nvPr/>
+        </p:nvSpPr>
+        <p:spPr>
+          <a:xfrm>
+            <a:off x="9951720" y="6455664"/>
+            <a:ext cx="2011680" cy="292608"/>
+          </a:xfrm>
+          <a:prstGeom prst="rect">
+            <a:avLst/>
+          </a:prstGeom>
+          <a:noFill/>
+        </p:spPr>
+        <p:txBody>
+          <a:bodyPr wrap="none" lIns="0" rIns="0" tIns="0" bIns="0">
+            <a:spAutoFit/>
+          </a:bodyPr>
+          <a:lstStyle/>
+          <a:p>
+            <a:pPr algn="r"/>
+            <a:r>
+              <a:rPr sz="1000">
+                <a:solidFill>
+                  <a:srgbClr val="8A939B"/>
+                </a:solidFill>
+                <a:hlinkClick r:id="rId3"/>
+              </a:rPr>
+              <a:t>cuinotes.com</a:t>
+            </a:r>
+            <a:r>
+              <a:rPr sz="1000">
+                <a:solidFill>
+                  <a:srgbClr val="8A939B"/>
+                </a:solidFill>
+              </a:rPr>
+              <a:t>  ·  23</a:t>
+            </a:r>
           </a:p>
         </p:txBody>
       </p:sp>
@@ -12492,6 +12148,10 @@
             <a:prstDash val="solid"/>
           </a:ln>
         </p:spPr>
+        <p:txBody>
+          <a:bodyPr/>
+          <a:p/>
+        </p:txBody>
       </p:sp>
       <p:sp>
         <p:nvSpPr>
@@ -12573,79 +12233,44 @@
       </p:sp>
       <p:sp>
         <p:nvSpPr>
-          <p:cNvPr id="7" name="Text 5"/>
-          <p:cNvSpPr txBox="1"/>
-          <p:nvPr/>
-        </p:nvSpPr>
-        <p:spPr>
-          <a:xfrm>
-            <a:off x="640080" y="6446520"/>
-            <a:ext cx="8686800" cy="292608"/>
-          </a:xfrm>
-          <a:prstGeom prst="rect">
-            <a:avLst/>
-          </a:prstGeom>
-          <a:noFill/>
-          <a:ln/>
-        </p:spPr>
-        <p:txBody>
-          <a:bodyPr wrap="square" lIns="0" tIns="0" rIns="0" bIns="0" rtlCol="0" anchor="ctr"/>
-          <a:lstStyle/>
-          <a:p>
-            <a:pPr algn="l" indent="0" marL="0">
-              <a:buNone/>
-            </a:pPr>
-            <a:r>
-              <a:rPr lang="en-US" sz="900" dirty="0">
-                <a:solidFill>
-                  <a:srgbClr val="5D5D72"/>
-                </a:solidFill>
-                <a:latin typeface="Calibri" pitchFamily="34" charset="0"/>
-                <a:ea typeface="Calibri" pitchFamily="34" charset="-122"/>
-                <a:cs typeface="Calibri" pitchFamily="34" charset="-120"/>
-              </a:rPr>
-              <a:t>Usman Akram  •  COMSATS University Islamabad</a:t>
-            </a:r>
-            <a:endParaRPr lang="en-US" sz="900" dirty="0"/>
-          </a:p>
-        </p:txBody>
-      </p:sp>
-      <p:sp>
-        <p:nvSpPr>
-          <p:cNvPr id="8" name="Text 6"/>
-          <p:cNvSpPr txBox="1"/>
-          <p:nvPr/>
-        </p:nvSpPr>
-        <p:spPr>
-          <a:xfrm>
-            <a:off x="11155680" y="6446520"/>
-            <a:ext cx="457200" cy="292608"/>
-          </a:xfrm>
-          <a:prstGeom prst="rect">
-            <a:avLst/>
-          </a:prstGeom>
-          <a:noFill/>
-          <a:ln/>
-        </p:spPr>
-        <p:txBody>
-          <a:bodyPr wrap="square" lIns="0" tIns="0" rIns="0" bIns="0" rtlCol="0" anchor="ctr"/>
-          <a:lstStyle/>
-          <a:p>
-            <a:pPr algn="r" indent="0" marL="0">
-              <a:buNone/>
-            </a:pPr>
-            <a:r>
-              <a:rPr lang="en-US" sz="900" dirty="0">
-                <a:solidFill>
-                  <a:srgbClr val="5D5D72"/>
-                </a:solidFill>
-                <a:latin typeface="Calibri" pitchFamily="34" charset="0"/>
-                <a:ea typeface="Calibri" pitchFamily="34" charset="-122"/>
-                <a:cs typeface="Calibri" pitchFamily="34" charset="-120"/>
-              </a:rPr>
-              <a:t>24</a:t>
-            </a:r>
-            <a:endParaRPr lang="en-US" sz="900" dirty="0"/>
+          <p:cNvPr id="9" name="cuinotes-footer-mark"/>
+          <p:cNvSpPr txBox="1"/>
+          <p:nvPr/>
+        </p:nvSpPr>
+        <p:spPr>
+          <a:xfrm>
+            <a:off x="9951720" y="6455664"/>
+            <a:ext cx="2011680" cy="292608"/>
+          </a:xfrm>
+          <a:prstGeom prst="rect">
+            <a:avLst/>
+          </a:prstGeom>
+          <a:noFill/>
+        </p:spPr>
+        <p:txBody>
+          <a:bodyPr wrap="none" lIns="0" rIns="0" tIns="0" bIns="0">
+            <a:spAutoFit/>
+          </a:bodyPr>
+          <a:lstStyle/>
+          <a:p>
+            <a:pPr algn="r"/>
+            <a:r>
+              <a:rPr sz="1000">
+                <a:solidFill>
+                  <a:srgbClr val="8A939B"/>
+                </a:solidFill>
+                <a:hlinkClick r:id="rId3"/>
+              </a:rPr>
+              <a:t>cuinotes.com</a:t>
+            </a:r>
+            <a:r>
+              <a:rPr sz="1000">
+                <a:solidFill>
+                  <a:srgbClr val="8A939B"/>
+                </a:solidFill>
+              </a:rPr>
+              <a:t>  ·  24</a:t>
+            </a:r>
           </a:p>
         </p:txBody>
       </p:sp>
@@ -12778,6 +12403,10 @@
           </a:solidFill>
           <a:ln/>
         </p:spPr>
+        <p:txBody>
+          <a:bodyPr/>
+          <a:p/>
+        </p:txBody>
       </p:sp>
       <p:sp>
         <p:nvSpPr>
@@ -12876,6 +12505,10 @@
           </a:solidFill>
           <a:ln/>
         </p:spPr>
+        <p:txBody>
+          <a:bodyPr/>
+          <a:p/>
+        </p:txBody>
       </p:sp>
       <p:sp>
         <p:nvSpPr>
@@ -12974,6 +12607,10 @@
           </a:solidFill>
           <a:ln/>
         </p:spPr>
+        <p:txBody>
+          <a:bodyPr/>
+          <a:p/>
+        </p:txBody>
       </p:sp>
       <p:sp>
         <p:nvSpPr>
@@ -13055,79 +12692,44 @@
       </p:sp>
       <p:sp>
         <p:nvSpPr>
-          <p:cNvPr id="13" name="Text 11"/>
-          <p:cNvSpPr txBox="1"/>
-          <p:nvPr/>
-        </p:nvSpPr>
-        <p:spPr>
-          <a:xfrm>
-            <a:off x="640080" y="6446520"/>
-            <a:ext cx="8686800" cy="292608"/>
-          </a:xfrm>
-          <a:prstGeom prst="rect">
-            <a:avLst/>
-          </a:prstGeom>
-          <a:noFill/>
-          <a:ln/>
-        </p:spPr>
-        <p:txBody>
-          <a:bodyPr wrap="square" lIns="0" tIns="0" rIns="0" bIns="0" rtlCol="0" anchor="ctr"/>
-          <a:lstStyle/>
-          <a:p>
-            <a:pPr algn="l" indent="0" marL="0">
-              <a:buNone/>
-            </a:pPr>
-            <a:r>
-              <a:rPr lang="en-US" sz="900" dirty="0">
-                <a:solidFill>
-                  <a:srgbClr val="5D5D72"/>
-                </a:solidFill>
-                <a:latin typeface="Calibri" pitchFamily="34" charset="0"/>
-                <a:ea typeface="Calibri" pitchFamily="34" charset="-122"/>
-                <a:cs typeface="Calibri" pitchFamily="34" charset="-120"/>
-              </a:rPr>
-              <a:t>Usman Akram  •  COMSATS University Islamabad</a:t>
-            </a:r>
-            <a:endParaRPr lang="en-US" sz="900" dirty="0"/>
-          </a:p>
-        </p:txBody>
-      </p:sp>
-      <p:sp>
-        <p:nvSpPr>
-          <p:cNvPr id="14" name="Text 12"/>
-          <p:cNvSpPr txBox="1"/>
-          <p:nvPr/>
-        </p:nvSpPr>
-        <p:spPr>
-          <a:xfrm>
-            <a:off x="11155680" y="6446520"/>
-            <a:ext cx="457200" cy="292608"/>
-          </a:xfrm>
-          <a:prstGeom prst="rect">
-            <a:avLst/>
-          </a:prstGeom>
-          <a:noFill/>
-          <a:ln/>
-        </p:spPr>
-        <p:txBody>
-          <a:bodyPr wrap="square" lIns="0" tIns="0" rIns="0" bIns="0" rtlCol="0" anchor="ctr"/>
-          <a:lstStyle/>
-          <a:p>
-            <a:pPr algn="r" indent="0" marL="0">
-              <a:buNone/>
-            </a:pPr>
-            <a:r>
-              <a:rPr lang="en-US" sz="900" dirty="0">
-                <a:solidFill>
-                  <a:srgbClr val="5D5D72"/>
-                </a:solidFill>
-                <a:latin typeface="Calibri" pitchFamily="34" charset="0"/>
-                <a:ea typeface="Calibri" pitchFamily="34" charset="-122"/>
-                <a:cs typeface="Calibri" pitchFamily="34" charset="-120"/>
-              </a:rPr>
-              <a:t>25</a:t>
-            </a:r>
-            <a:endParaRPr lang="en-US" sz="900" dirty="0"/>
+          <p:cNvPr id="15" name="cuinotes-footer-mark"/>
+          <p:cNvSpPr txBox="1"/>
+          <p:nvPr/>
+        </p:nvSpPr>
+        <p:spPr>
+          <a:xfrm>
+            <a:off x="9951720" y="6455664"/>
+            <a:ext cx="2011680" cy="292608"/>
+          </a:xfrm>
+          <a:prstGeom prst="rect">
+            <a:avLst/>
+          </a:prstGeom>
+          <a:noFill/>
+        </p:spPr>
+        <p:txBody>
+          <a:bodyPr wrap="none" lIns="0" rIns="0" tIns="0" bIns="0">
+            <a:spAutoFit/>
+          </a:bodyPr>
+          <a:lstStyle/>
+          <a:p>
+            <a:pPr algn="r"/>
+            <a:r>
+              <a:rPr sz="1000">
+                <a:solidFill>
+                  <a:srgbClr val="8A939B"/>
+                </a:solidFill>
+                <a:hlinkClick r:id="rId3"/>
+              </a:rPr>
+              <a:t>cuinotes.com</a:t>
+            </a:r>
+            <a:r>
+              <a:rPr sz="1000">
+                <a:solidFill>
+                  <a:srgbClr val="8A939B"/>
+                </a:solidFill>
+              </a:rPr>
+              <a:t>  ·  25</a:t>
+            </a:r>
           </a:p>
         </p:txBody>
       </p:sp>
@@ -13260,6 +12862,10 @@
           </a:solidFill>
           <a:ln/>
         </p:spPr>
+        <p:txBody>
+          <a:bodyPr/>
+          <a:p/>
+        </p:txBody>
       </p:sp>
       <p:sp>
         <p:nvSpPr>
@@ -13358,6 +12964,10 @@
           </a:solidFill>
           <a:ln/>
         </p:spPr>
+        <p:txBody>
+          <a:bodyPr/>
+          <a:p/>
+        </p:txBody>
       </p:sp>
       <p:sp>
         <p:nvSpPr>
@@ -13456,6 +13066,10 @@
           </a:solidFill>
           <a:ln/>
         </p:spPr>
+        <p:txBody>
+          <a:bodyPr/>
+          <a:p/>
+        </p:txBody>
       </p:sp>
       <p:sp>
         <p:nvSpPr>
@@ -13537,79 +13151,44 @@
       </p:sp>
       <p:sp>
         <p:nvSpPr>
-          <p:cNvPr id="13" name="Text 11"/>
-          <p:cNvSpPr txBox="1"/>
-          <p:nvPr/>
-        </p:nvSpPr>
-        <p:spPr>
-          <a:xfrm>
-            <a:off x="640080" y="6446520"/>
-            <a:ext cx="8686800" cy="292608"/>
-          </a:xfrm>
-          <a:prstGeom prst="rect">
-            <a:avLst/>
-          </a:prstGeom>
-          <a:noFill/>
-          <a:ln/>
-        </p:spPr>
-        <p:txBody>
-          <a:bodyPr wrap="square" lIns="0" tIns="0" rIns="0" bIns="0" rtlCol="0" anchor="ctr"/>
-          <a:lstStyle/>
-          <a:p>
-            <a:pPr algn="l" indent="0" marL="0">
-              <a:buNone/>
-            </a:pPr>
-            <a:r>
-              <a:rPr lang="en-US" sz="900" dirty="0">
-                <a:solidFill>
-                  <a:srgbClr val="5D5D72"/>
-                </a:solidFill>
-                <a:latin typeface="Calibri" pitchFamily="34" charset="0"/>
-                <a:ea typeface="Calibri" pitchFamily="34" charset="-122"/>
-                <a:cs typeface="Calibri" pitchFamily="34" charset="-120"/>
-              </a:rPr>
-              <a:t>Usman Akram  •  COMSATS University Islamabad</a:t>
-            </a:r>
-            <a:endParaRPr lang="en-US" sz="900" dirty="0"/>
-          </a:p>
-        </p:txBody>
-      </p:sp>
-      <p:sp>
-        <p:nvSpPr>
-          <p:cNvPr id="14" name="Text 12"/>
-          <p:cNvSpPr txBox="1"/>
-          <p:nvPr/>
-        </p:nvSpPr>
-        <p:spPr>
-          <a:xfrm>
-            <a:off x="11155680" y="6446520"/>
-            <a:ext cx="457200" cy="292608"/>
-          </a:xfrm>
-          <a:prstGeom prst="rect">
-            <a:avLst/>
-          </a:prstGeom>
-          <a:noFill/>
-          <a:ln/>
-        </p:spPr>
-        <p:txBody>
-          <a:bodyPr wrap="square" lIns="0" tIns="0" rIns="0" bIns="0" rtlCol="0" anchor="ctr"/>
-          <a:lstStyle/>
-          <a:p>
-            <a:pPr algn="r" indent="0" marL="0">
-              <a:buNone/>
-            </a:pPr>
-            <a:r>
-              <a:rPr lang="en-US" sz="900" dirty="0">
-                <a:solidFill>
-                  <a:srgbClr val="5D5D72"/>
-                </a:solidFill>
-                <a:latin typeface="Calibri" pitchFamily="34" charset="0"/>
-                <a:ea typeface="Calibri" pitchFamily="34" charset="-122"/>
-                <a:cs typeface="Calibri" pitchFamily="34" charset="-120"/>
-              </a:rPr>
-              <a:t>26</a:t>
-            </a:r>
-            <a:endParaRPr lang="en-US" sz="900" dirty="0"/>
+          <p:cNvPr id="15" name="cuinotes-footer-mark"/>
+          <p:cNvSpPr txBox="1"/>
+          <p:nvPr/>
+        </p:nvSpPr>
+        <p:spPr>
+          <a:xfrm>
+            <a:off x="9951720" y="6455664"/>
+            <a:ext cx="2011680" cy="292608"/>
+          </a:xfrm>
+          <a:prstGeom prst="rect">
+            <a:avLst/>
+          </a:prstGeom>
+          <a:noFill/>
+        </p:spPr>
+        <p:txBody>
+          <a:bodyPr wrap="none" lIns="0" rIns="0" tIns="0" bIns="0">
+            <a:spAutoFit/>
+          </a:bodyPr>
+          <a:lstStyle/>
+          <a:p>
+            <a:pPr algn="r"/>
+            <a:r>
+              <a:rPr sz="1000">
+                <a:solidFill>
+                  <a:srgbClr val="8A939B"/>
+                </a:solidFill>
+                <a:hlinkClick r:id="rId3"/>
+              </a:rPr>
+              <a:t>cuinotes.com</a:t>
+            </a:r>
+            <a:r>
+              <a:rPr sz="1000">
+                <a:solidFill>
+                  <a:srgbClr val="8A939B"/>
+                </a:solidFill>
+              </a:rPr>
+              <a:t>  ·  26</a:t>
+            </a:r>
           </a:p>
         </p:txBody>
       </p:sp>
@@ -13749,6 +13328,10 @@
             <a:prstDash val="solid"/>
           </a:ln>
         </p:spPr>
+        <p:txBody>
+          <a:bodyPr/>
+          <a:p/>
+        </p:txBody>
       </p:sp>
       <p:sp>
         <p:nvSpPr>
@@ -13830,79 +13413,44 @@
       </p:sp>
       <p:sp>
         <p:nvSpPr>
-          <p:cNvPr id="7" name="Text 5"/>
-          <p:cNvSpPr txBox="1"/>
-          <p:nvPr/>
-        </p:nvSpPr>
-        <p:spPr>
-          <a:xfrm>
-            <a:off x="640080" y="6446520"/>
-            <a:ext cx="8686800" cy="292608"/>
-          </a:xfrm>
-          <a:prstGeom prst="rect">
-            <a:avLst/>
-          </a:prstGeom>
-          <a:noFill/>
-          <a:ln/>
-        </p:spPr>
-        <p:txBody>
-          <a:bodyPr wrap="square" lIns="0" tIns="0" rIns="0" bIns="0" rtlCol="0" anchor="ctr"/>
-          <a:lstStyle/>
-          <a:p>
-            <a:pPr algn="l" indent="0" marL="0">
-              <a:buNone/>
-            </a:pPr>
-            <a:r>
-              <a:rPr lang="en-US" sz="900" dirty="0">
-                <a:solidFill>
-                  <a:srgbClr val="5D5D72"/>
-                </a:solidFill>
-                <a:latin typeface="Calibri" pitchFamily="34" charset="0"/>
-                <a:ea typeface="Calibri" pitchFamily="34" charset="-122"/>
-                <a:cs typeface="Calibri" pitchFamily="34" charset="-120"/>
-              </a:rPr>
-              <a:t>Usman Akram  •  COMSATS University Islamabad</a:t>
-            </a:r>
-            <a:endParaRPr lang="en-US" sz="900" dirty="0"/>
-          </a:p>
-        </p:txBody>
-      </p:sp>
-      <p:sp>
-        <p:nvSpPr>
-          <p:cNvPr id="8" name="Text 6"/>
-          <p:cNvSpPr txBox="1"/>
-          <p:nvPr/>
-        </p:nvSpPr>
-        <p:spPr>
-          <a:xfrm>
-            <a:off x="11155680" y="6446520"/>
-            <a:ext cx="457200" cy="292608"/>
-          </a:xfrm>
-          <a:prstGeom prst="rect">
-            <a:avLst/>
-          </a:prstGeom>
-          <a:noFill/>
-          <a:ln/>
-        </p:spPr>
-        <p:txBody>
-          <a:bodyPr wrap="square" lIns="0" tIns="0" rIns="0" bIns="0" rtlCol="0" anchor="ctr"/>
-          <a:lstStyle/>
-          <a:p>
-            <a:pPr algn="r" indent="0" marL="0">
-              <a:buNone/>
-            </a:pPr>
-            <a:r>
-              <a:rPr lang="en-US" sz="900" dirty="0">
-                <a:solidFill>
-                  <a:srgbClr val="5D5D72"/>
-                </a:solidFill>
-                <a:latin typeface="Calibri" pitchFamily="34" charset="0"/>
-                <a:ea typeface="Calibri" pitchFamily="34" charset="-122"/>
-                <a:cs typeface="Calibri" pitchFamily="34" charset="-120"/>
-              </a:rPr>
-              <a:t>27</a:t>
-            </a:r>
-            <a:endParaRPr lang="en-US" sz="900" dirty="0"/>
+          <p:cNvPr id="9" name="cuinotes-footer-mark"/>
+          <p:cNvSpPr txBox="1"/>
+          <p:nvPr/>
+        </p:nvSpPr>
+        <p:spPr>
+          <a:xfrm>
+            <a:off x="9951720" y="6455664"/>
+            <a:ext cx="2011680" cy="292608"/>
+          </a:xfrm>
+          <a:prstGeom prst="rect">
+            <a:avLst/>
+          </a:prstGeom>
+          <a:noFill/>
+        </p:spPr>
+        <p:txBody>
+          <a:bodyPr wrap="none" lIns="0" rIns="0" tIns="0" bIns="0">
+            <a:spAutoFit/>
+          </a:bodyPr>
+          <a:lstStyle/>
+          <a:p>
+            <a:pPr algn="r"/>
+            <a:r>
+              <a:rPr sz="1000">
+                <a:solidFill>
+                  <a:srgbClr val="8A939B"/>
+                </a:solidFill>
+                <a:hlinkClick r:id="rId3"/>
+              </a:rPr>
+              <a:t>cuinotes.com</a:t>
+            </a:r>
+            <a:r>
+              <a:rPr sz="1000">
+                <a:solidFill>
+                  <a:srgbClr val="8A939B"/>
+                </a:solidFill>
+              </a:rPr>
+              <a:t>  ·  27</a:t>
+            </a:r>
           </a:p>
         </p:txBody>
       </p:sp>
@@ -14037,6 +13585,10 @@
           </a:solidFill>
           <a:ln/>
         </p:spPr>
+        <p:txBody>
+          <a:bodyPr/>
+          <a:p/>
+        </p:txBody>
       </p:sp>
       <p:sp>
         <p:nvSpPr>
@@ -14250,79 +13802,44 @@
       </p:sp>
       <p:sp>
         <p:nvSpPr>
-          <p:cNvPr id="7" name="Text 5"/>
-          <p:cNvSpPr txBox="1"/>
-          <p:nvPr/>
-        </p:nvSpPr>
-        <p:spPr>
-          <a:xfrm>
-            <a:off x="640080" y="6446520"/>
-            <a:ext cx="8686800" cy="292608"/>
-          </a:xfrm>
-          <a:prstGeom prst="rect">
-            <a:avLst/>
-          </a:prstGeom>
-          <a:noFill/>
-          <a:ln/>
-        </p:spPr>
-        <p:txBody>
-          <a:bodyPr wrap="square" lIns="0" tIns="0" rIns="0" bIns="0" rtlCol="0" anchor="ctr"/>
-          <a:lstStyle/>
-          <a:p>
-            <a:pPr algn="l" indent="0" marL="0">
-              <a:buNone/>
-            </a:pPr>
-            <a:r>
-              <a:rPr lang="en-US" sz="900" dirty="0">
-                <a:solidFill>
-                  <a:srgbClr val="5D5D72"/>
-                </a:solidFill>
-                <a:latin typeface="Calibri" pitchFamily="34" charset="0"/>
-                <a:ea typeface="Calibri" pitchFamily="34" charset="-122"/>
-                <a:cs typeface="Calibri" pitchFamily="34" charset="-120"/>
-              </a:rPr>
-              <a:t>Usman Akram  •  COMSATS University Islamabad</a:t>
-            </a:r>
-            <a:endParaRPr lang="en-US" sz="900" dirty="0"/>
-          </a:p>
-        </p:txBody>
-      </p:sp>
-      <p:sp>
-        <p:nvSpPr>
-          <p:cNvPr id="8" name="Text 6"/>
-          <p:cNvSpPr txBox="1"/>
-          <p:nvPr/>
-        </p:nvSpPr>
-        <p:spPr>
-          <a:xfrm>
-            <a:off x="11155680" y="6446520"/>
-            <a:ext cx="457200" cy="292608"/>
-          </a:xfrm>
-          <a:prstGeom prst="rect">
-            <a:avLst/>
-          </a:prstGeom>
-          <a:noFill/>
-          <a:ln/>
-        </p:spPr>
-        <p:txBody>
-          <a:bodyPr wrap="square" lIns="0" tIns="0" rIns="0" bIns="0" rtlCol="0" anchor="ctr"/>
-          <a:lstStyle/>
-          <a:p>
-            <a:pPr algn="r" indent="0" marL="0">
-              <a:buNone/>
-            </a:pPr>
-            <a:r>
-              <a:rPr lang="en-US" sz="900" dirty="0">
-                <a:solidFill>
-                  <a:srgbClr val="5D5D72"/>
-                </a:solidFill>
-                <a:latin typeface="Calibri" pitchFamily="34" charset="0"/>
-                <a:ea typeface="Calibri" pitchFamily="34" charset="-122"/>
-                <a:cs typeface="Calibri" pitchFamily="34" charset="-120"/>
-              </a:rPr>
-              <a:t>28</a:t>
-            </a:r>
-            <a:endParaRPr lang="en-US" sz="900" dirty="0"/>
+          <p:cNvPr id="9" name="cuinotes-footer-mark"/>
+          <p:cNvSpPr txBox="1"/>
+          <p:nvPr/>
+        </p:nvSpPr>
+        <p:spPr>
+          <a:xfrm>
+            <a:off x="9951720" y="6455664"/>
+            <a:ext cx="2011680" cy="292608"/>
+          </a:xfrm>
+          <a:prstGeom prst="rect">
+            <a:avLst/>
+          </a:prstGeom>
+          <a:noFill/>
+        </p:spPr>
+        <p:txBody>
+          <a:bodyPr wrap="none" lIns="0" rIns="0" tIns="0" bIns="0">
+            <a:spAutoFit/>
+          </a:bodyPr>
+          <a:lstStyle/>
+          <a:p>
+            <a:pPr algn="r"/>
+            <a:r>
+              <a:rPr sz="1000">
+                <a:solidFill>
+                  <a:srgbClr val="8A939B"/>
+                </a:solidFill>
+                <a:hlinkClick r:id="rId3"/>
+              </a:rPr>
+              <a:t>cuinotes.com</a:t>
+            </a:r>
+            <a:r>
+              <a:rPr sz="1000">
+                <a:solidFill>
+                  <a:srgbClr val="8A939B"/>
+                </a:solidFill>
+              </a:rPr>
+              <a:t>  ·  28</a:t>
+            </a:r>
           </a:p>
         </p:txBody>
       </p:sp>
@@ -14455,6 +13972,10 @@
           </a:solidFill>
           <a:ln/>
         </p:spPr>
+        <p:txBody>
+          <a:bodyPr/>
+          <a:p/>
+        </p:txBody>
       </p:sp>
       <p:sp>
         <p:nvSpPr>
@@ -14553,6 +14074,10 @@
           </a:solidFill>
           <a:ln/>
         </p:spPr>
+        <p:txBody>
+          <a:bodyPr/>
+          <a:p/>
+        </p:txBody>
       </p:sp>
       <p:sp>
         <p:nvSpPr>
@@ -14651,6 +14176,10 @@
           </a:solidFill>
           <a:ln/>
         </p:spPr>
+        <p:txBody>
+          <a:bodyPr/>
+          <a:p/>
+        </p:txBody>
       </p:sp>
       <p:sp>
         <p:nvSpPr>
@@ -14749,6 +14278,10 @@
           </a:solidFill>
           <a:ln/>
         </p:spPr>
+        <p:txBody>
+          <a:bodyPr/>
+          <a:p/>
+        </p:txBody>
       </p:sp>
       <p:sp>
         <p:nvSpPr>
@@ -14847,6 +14380,10 @@
           </a:solidFill>
           <a:ln/>
         </p:spPr>
+        <p:txBody>
+          <a:bodyPr/>
+          <a:p/>
+        </p:txBody>
       </p:sp>
       <p:sp>
         <p:nvSpPr>
@@ -14945,6 +14482,10 @@
           </a:solidFill>
           <a:ln/>
         </p:spPr>
+        <p:txBody>
+          <a:bodyPr/>
+          <a:p/>
+        </p:txBody>
       </p:sp>
       <p:sp>
         <p:nvSpPr>
@@ -15026,79 +14567,44 @@
       </p:sp>
       <p:sp>
         <p:nvSpPr>
-          <p:cNvPr id="22" name="Text 20"/>
-          <p:cNvSpPr txBox="1"/>
-          <p:nvPr/>
-        </p:nvSpPr>
-        <p:spPr>
-          <a:xfrm>
-            <a:off x="640080" y="6446520"/>
-            <a:ext cx="8686800" cy="292608"/>
-          </a:xfrm>
-          <a:prstGeom prst="rect">
-            <a:avLst/>
-          </a:prstGeom>
-          <a:noFill/>
-          <a:ln/>
-        </p:spPr>
-        <p:txBody>
-          <a:bodyPr wrap="square" lIns="0" tIns="0" rIns="0" bIns="0" rtlCol="0" anchor="ctr"/>
-          <a:lstStyle/>
-          <a:p>
-            <a:pPr algn="l" indent="0" marL="0">
-              <a:buNone/>
-            </a:pPr>
-            <a:r>
-              <a:rPr lang="en-US" sz="900" dirty="0">
-                <a:solidFill>
-                  <a:srgbClr val="9AA3D8"/>
-                </a:solidFill>
-                <a:latin typeface="Calibri" pitchFamily="34" charset="0"/>
-                <a:ea typeface="Calibri" pitchFamily="34" charset="-122"/>
-                <a:cs typeface="Calibri" pitchFamily="34" charset="-120"/>
-              </a:rPr>
-              <a:t>Usman Akram  •  COMSATS University Islamabad</a:t>
-            </a:r>
-            <a:endParaRPr lang="en-US" sz="900" dirty="0"/>
-          </a:p>
-        </p:txBody>
-      </p:sp>
-      <p:sp>
-        <p:nvSpPr>
-          <p:cNvPr id="23" name="Text 21"/>
-          <p:cNvSpPr txBox="1"/>
-          <p:nvPr/>
-        </p:nvSpPr>
-        <p:spPr>
-          <a:xfrm>
-            <a:off x="11155680" y="6446520"/>
-            <a:ext cx="457200" cy="292608"/>
-          </a:xfrm>
-          <a:prstGeom prst="rect">
-            <a:avLst/>
-          </a:prstGeom>
-          <a:noFill/>
-          <a:ln/>
-        </p:spPr>
-        <p:txBody>
-          <a:bodyPr wrap="square" lIns="0" tIns="0" rIns="0" bIns="0" rtlCol="0" anchor="ctr"/>
-          <a:lstStyle/>
-          <a:p>
-            <a:pPr algn="r" indent="0" marL="0">
-              <a:buNone/>
-            </a:pPr>
-            <a:r>
-              <a:rPr lang="en-US" sz="900" dirty="0">
-                <a:solidFill>
-                  <a:srgbClr val="9AA3D8"/>
-                </a:solidFill>
-                <a:latin typeface="Calibri" pitchFamily="34" charset="0"/>
-                <a:ea typeface="Calibri" pitchFamily="34" charset="-122"/>
-                <a:cs typeface="Calibri" pitchFamily="34" charset="-120"/>
-              </a:rPr>
-              <a:t>29</a:t>
-            </a:r>
-            <a:endParaRPr lang="en-US" sz="900" dirty="0"/>
+          <p:cNvPr id="24" name="cuinotes-footer-mark"/>
+          <p:cNvSpPr txBox="1"/>
+          <p:nvPr/>
+        </p:nvSpPr>
+        <p:spPr>
+          <a:xfrm>
+            <a:off x="9951720" y="6455664"/>
+            <a:ext cx="2011680" cy="292608"/>
+          </a:xfrm>
+          <a:prstGeom prst="rect">
+            <a:avLst/>
+          </a:prstGeom>
+          <a:noFill/>
+        </p:spPr>
+        <p:txBody>
+          <a:bodyPr wrap="none" lIns="0" rIns="0" tIns="0" bIns="0">
+            <a:spAutoFit/>
+          </a:bodyPr>
+          <a:lstStyle/>
+          <a:p>
+            <a:pPr algn="r"/>
+            <a:r>
+              <a:rPr sz="1000">
+                <a:solidFill>
+                  <a:srgbClr val="8A939B"/>
+                </a:solidFill>
+                <a:hlinkClick r:id="rId3"/>
+              </a:rPr>
+              <a:t>cuinotes.com</a:t>
+            </a:r>
+            <a:r>
+              <a:rPr sz="1000">
+                <a:solidFill>
+                  <a:srgbClr val="8A939B"/>
+                </a:solidFill>
+              </a:rPr>
+              <a:t>  ·  29</a:t>
+            </a:r>
           </a:p>
         </p:txBody>
       </p:sp>
@@ -15231,6 +14737,10 @@
           </a:solidFill>
           <a:ln/>
         </p:spPr>
+        <p:txBody>
+          <a:bodyPr/>
+          <a:p/>
+        </p:txBody>
       </p:sp>
       <p:sp>
         <p:nvSpPr>
@@ -15329,6 +14839,10 @@
           </a:solidFill>
           <a:ln/>
         </p:spPr>
+        <p:txBody>
+          <a:bodyPr/>
+          <a:p/>
+        </p:txBody>
       </p:sp>
       <p:sp>
         <p:nvSpPr>
@@ -15427,6 +14941,10 @@
           </a:solidFill>
           <a:ln/>
         </p:spPr>
+        <p:txBody>
+          <a:bodyPr/>
+          <a:p/>
+        </p:txBody>
       </p:sp>
       <p:sp>
         <p:nvSpPr>
@@ -15508,79 +15026,44 @@
       </p:sp>
       <p:sp>
         <p:nvSpPr>
-          <p:cNvPr id="13" name="Text 11"/>
-          <p:cNvSpPr txBox="1"/>
-          <p:nvPr/>
-        </p:nvSpPr>
-        <p:spPr>
-          <a:xfrm>
-            <a:off x="640080" y="6446520"/>
-            <a:ext cx="8686800" cy="292608"/>
-          </a:xfrm>
-          <a:prstGeom prst="rect">
-            <a:avLst/>
-          </a:prstGeom>
-          <a:noFill/>
-          <a:ln/>
-        </p:spPr>
-        <p:txBody>
-          <a:bodyPr wrap="square" lIns="0" tIns="0" rIns="0" bIns="0" rtlCol="0" anchor="ctr"/>
-          <a:lstStyle/>
-          <a:p>
-            <a:pPr algn="l" indent="0" marL="0">
-              <a:buNone/>
-            </a:pPr>
-            <a:r>
-              <a:rPr lang="en-US" sz="900" dirty="0">
-                <a:solidFill>
-                  <a:srgbClr val="5D5D72"/>
-                </a:solidFill>
-                <a:latin typeface="Calibri" pitchFamily="34" charset="0"/>
-                <a:ea typeface="Calibri" pitchFamily="34" charset="-122"/>
-                <a:cs typeface="Calibri" pitchFamily="34" charset="-120"/>
-              </a:rPr>
-              <a:t>Usman Akram  •  COMSATS University Islamabad</a:t>
-            </a:r>
-            <a:endParaRPr lang="en-US" sz="900" dirty="0"/>
-          </a:p>
-        </p:txBody>
-      </p:sp>
-      <p:sp>
-        <p:nvSpPr>
-          <p:cNvPr id="14" name="Text 12"/>
-          <p:cNvSpPr txBox="1"/>
-          <p:nvPr/>
-        </p:nvSpPr>
-        <p:spPr>
-          <a:xfrm>
-            <a:off x="11155680" y="6446520"/>
-            <a:ext cx="457200" cy="292608"/>
-          </a:xfrm>
-          <a:prstGeom prst="rect">
-            <a:avLst/>
-          </a:prstGeom>
-          <a:noFill/>
-          <a:ln/>
-        </p:spPr>
-        <p:txBody>
-          <a:bodyPr wrap="square" lIns="0" tIns="0" rIns="0" bIns="0" rtlCol="0" anchor="ctr"/>
-          <a:lstStyle/>
-          <a:p>
-            <a:pPr algn="r" indent="0" marL="0">
-              <a:buNone/>
-            </a:pPr>
-            <a:r>
-              <a:rPr lang="en-US" sz="900" dirty="0">
-                <a:solidFill>
-                  <a:srgbClr val="5D5D72"/>
-                </a:solidFill>
-                <a:latin typeface="Calibri" pitchFamily="34" charset="0"/>
-                <a:ea typeface="Calibri" pitchFamily="34" charset="-122"/>
-                <a:cs typeface="Calibri" pitchFamily="34" charset="-120"/>
-              </a:rPr>
-              <a:t>3</a:t>
-            </a:r>
-            <a:endParaRPr lang="en-US" sz="900" dirty="0"/>
+          <p:cNvPr id="15" name="cuinotes-footer-mark"/>
+          <p:cNvSpPr txBox="1"/>
+          <p:nvPr/>
+        </p:nvSpPr>
+        <p:spPr>
+          <a:xfrm>
+            <a:off x="9951720" y="6455664"/>
+            <a:ext cx="2011680" cy="292608"/>
+          </a:xfrm>
+          <a:prstGeom prst="rect">
+            <a:avLst/>
+          </a:prstGeom>
+          <a:noFill/>
+        </p:spPr>
+        <p:txBody>
+          <a:bodyPr wrap="none" lIns="0" rIns="0" tIns="0" bIns="0">
+            <a:spAutoFit/>
+          </a:bodyPr>
+          <a:lstStyle/>
+          <a:p>
+            <a:pPr algn="r"/>
+            <a:r>
+              <a:rPr sz="1000">
+                <a:solidFill>
+                  <a:srgbClr val="8A939B"/>
+                </a:solidFill>
+                <a:hlinkClick r:id="rId3"/>
+              </a:rPr>
+              <a:t>cuinotes.com</a:t>
+            </a:r>
+            <a:r>
+              <a:rPr sz="1000">
+                <a:solidFill>
+                  <a:srgbClr val="8A939B"/>
+                </a:solidFill>
+              </a:rPr>
+              <a:t>  ·  3</a:t>
+            </a:r>
           </a:p>
         </p:txBody>
       </p:sp>
@@ -15720,6 +15203,10 @@
             <a:prstDash val="solid"/>
           </a:ln>
         </p:spPr>
+        <p:txBody>
+          <a:bodyPr/>
+          <a:p/>
+        </p:txBody>
       </p:sp>
       <p:sp>
         <p:nvSpPr>
@@ -15801,79 +15288,44 @@
       </p:sp>
       <p:sp>
         <p:nvSpPr>
-          <p:cNvPr id="7" name="Text 5"/>
-          <p:cNvSpPr txBox="1"/>
-          <p:nvPr/>
-        </p:nvSpPr>
-        <p:spPr>
-          <a:xfrm>
-            <a:off x="640080" y="6446520"/>
-            <a:ext cx="8686800" cy="292608"/>
-          </a:xfrm>
-          <a:prstGeom prst="rect">
-            <a:avLst/>
-          </a:prstGeom>
-          <a:noFill/>
-          <a:ln/>
-        </p:spPr>
-        <p:txBody>
-          <a:bodyPr wrap="square" lIns="0" tIns="0" rIns="0" bIns="0" rtlCol="0" anchor="ctr"/>
-          <a:lstStyle/>
-          <a:p>
-            <a:pPr algn="l" indent="0" marL="0">
-              <a:buNone/>
-            </a:pPr>
-            <a:r>
-              <a:rPr lang="en-US" sz="900" dirty="0">
-                <a:solidFill>
-                  <a:srgbClr val="5D5D72"/>
-                </a:solidFill>
-                <a:latin typeface="Calibri" pitchFamily="34" charset="0"/>
-                <a:ea typeface="Calibri" pitchFamily="34" charset="-122"/>
-                <a:cs typeface="Calibri" pitchFamily="34" charset="-120"/>
-              </a:rPr>
-              <a:t>Usman Akram  •  COMSATS University Islamabad</a:t>
-            </a:r>
-            <a:endParaRPr lang="en-US" sz="900" dirty="0"/>
-          </a:p>
-        </p:txBody>
-      </p:sp>
-      <p:sp>
-        <p:nvSpPr>
-          <p:cNvPr id="8" name="Text 6"/>
-          <p:cNvSpPr txBox="1"/>
-          <p:nvPr/>
-        </p:nvSpPr>
-        <p:spPr>
-          <a:xfrm>
-            <a:off x="11155680" y="6446520"/>
-            <a:ext cx="457200" cy="292608"/>
-          </a:xfrm>
-          <a:prstGeom prst="rect">
-            <a:avLst/>
-          </a:prstGeom>
-          <a:noFill/>
-          <a:ln/>
-        </p:spPr>
-        <p:txBody>
-          <a:bodyPr wrap="square" lIns="0" tIns="0" rIns="0" bIns="0" rtlCol="0" anchor="ctr"/>
-          <a:lstStyle/>
-          <a:p>
-            <a:pPr algn="r" indent="0" marL="0">
-              <a:buNone/>
-            </a:pPr>
-            <a:r>
-              <a:rPr lang="en-US" sz="900" dirty="0">
-                <a:solidFill>
-                  <a:srgbClr val="5D5D72"/>
-                </a:solidFill>
-                <a:latin typeface="Calibri" pitchFamily="34" charset="0"/>
-                <a:ea typeface="Calibri" pitchFamily="34" charset="-122"/>
-                <a:cs typeface="Calibri" pitchFamily="34" charset="-120"/>
-              </a:rPr>
-              <a:t>4</a:t>
-            </a:r>
-            <a:endParaRPr lang="en-US" sz="900" dirty="0"/>
+          <p:cNvPr id="9" name="cuinotes-footer-mark"/>
+          <p:cNvSpPr txBox="1"/>
+          <p:nvPr/>
+        </p:nvSpPr>
+        <p:spPr>
+          <a:xfrm>
+            <a:off x="9951720" y="6455664"/>
+            <a:ext cx="2011680" cy="292608"/>
+          </a:xfrm>
+          <a:prstGeom prst="rect">
+            <a:avLst/>
+          </a:prstGeom>
+          <a:noFill/>
+        </p:spPr>
+        <p:txBody>
+          <a:bodyPr wrap="none" lIns="0" rIns="0" tIns="0" bIns="0">
+            <a:spAutoFit/>
+          </a:bodyPr>
+          <a:lstStyle/>
+          <a:p>
+            <a:pPr algn="r"/>
+            <a:r>
+              <a:rPr sz="1000">
+                <a:solidFill>
+                  <a:srgbClr val="8A939B"/>
+                </a:solidFill>
+                <a:hlinkClick r:id="rId3"/>
+              </a:rPr>
+              <a:t>cuinotes.com</a:t>
+            </a:r>
+            <a:r>
+              <a:rPr sz="1000">
+                <a:solidFill>
+                  <a:srgbClr val="8A939B"/>
+                </a:solidFill>
+              </a:rPr>
+              <a:t>  ·  4</a:t>
+            </a:r>
           </a:p>
         </p:txBody>
       </p:sp>
@@ -16010,6 +15462,10 @@
             <a:tailEnd type="triangle"/>
           </a:ln>
         </p:spPr>
+        <p:txBody>
+          <a:bodyPr/>
+          <a:p/>
+        </p:txBody>
       </p:sp>
       <p:sp>
         <p:nvSpPr>
@@ -16034,6 +15490,10 @@
             <a:tailEnd type="triangle"/>
           </a:ln>
         </p:spPr>
+        <p:txBody>
+          <a:bodyPr/>
+          <a:p/>
+        </p:txBody>
       </p:sp>
       <p:sp>
         <p:nvSpPr>
@@ -16058,6 +15518,10 @@
             <a:tailEnd type="triangle"/>
           </a:ln>
         </p:spPr>
+        <p:txBody>
+          <a:bodyPr/>
+          <a:p/>
+        </p:txBody>
       </p:sp>
       <p:sp>
         <p:nvSpPr>
@@ -16078,6 +15542,10 @@
           </a:solidFill>
           <a:ln/>
         </p:spPr>
+        <p:txBody>
+          <a:bodyPr/>
+          <a:p/>
+        </p:txBody>
       </p:sp>
       <p:sp>
         <p:nvSpPr>
@@ -16140,6 +15608,10 @@
           </a:solidFill>
           <a:ln/>
         </p:spPr>
+        <p:txBody>
+          <a:bodyPr/>
+          <a:p/>
+        </p:txBody>
       </p:sp>
       <p:sp>
         <p:nvSpPr>
@@ -16242,6 +15714,10 @@
           </a:solidFill>
           <a:ln/>
         </p:spPr>
+        <p:txBody>
+          <a:bodyPr/>
+          <a:p/>
+        </p:txBody>
       </p:sp>
       <p:sp>
         <p:nvSpPr>
@@ -16344,6 +15820,10 @@
           </a:solidFill>
           <a:ln/>
         </p:spPr>
+        <p:txBody>
+          <a:bodyPr/>
+          <a:p/>
+        </p:txBody>
       </p:sp>
       <p:sp>
         <p:nvSpPr>
@@ -16468,79 +15948,44 @@
       </p:sp>
       <p:sp>
         <p:nvSpPr>
-          <p:cNvPr id="16" name="Text 14"/>
-          <p:cNvSpPr txBox="1"/>
-          <p:nvPr/>
-        </p:nvSpPr>
-        <p:spPr>
-          <a:xfrm>
-            <a:off x="640080" y="6446520"/>
-            <a:ext cx="8686800" cy="292608"/>
-          </a:xfrm>
-          <a:prstGeom prst="rect">
-            <a:avLst/>
-          </a:prstGeom>
-          <a:noFill/>
-          <a:ln/>
-        </p:spPr>
-        <p:txBody>
-          <a:bodyPr wrap="square" lIns="0" tIns="0" rIns="0" bIns="0" rtlCol="0" anchor="ctr"/>
-          <a:lstStyle/>
-          <a:p>
-            <a:pPr algn="l" indent="0" marL="0">
-              <a:buNone/>
-            </a:pPr>
-            <a:r>
-              <a:rPr lang="en-US" sz="900" dirty="0">
-                <a:solidFill>
-                  <a:srgbClr val="5D5D72"/>
-                </a:solidFill>
-                <a:latin typeface="Calibri" pitchFamily="34" charset="0"/>
-                <a:ea typeface="Calibri" pitchFamily="34" charset="-122"/>
-                <a:cs typeface="Calibri" pitchFamily="34" charset="-120"/>
-              </a:rPr>
-              <a:t>Usman Akram  •  COMSATS University Islamabad</a:t>
-            </a:r>
-            <a:endParaRPr lang="en-US" sz="900" dirty="0"/>
-          </a:p>
-        </p:txBody>
-      </p:sp>
-      <p:sp>
-        <p:nvSpPr>
-          <p:cNvPr id="17" name="Text 15"/>
-          <p:cNvSpPr txBox="1"/>
-          <p:nvPr/>
-        </p:nvSpPr>
-        <p:spPr>
-          <a:xfrm>
-            <a:off x="11155680" y="6446520"/>
-            <a:ext cx="457200" cy="292608"/>
-          </a:xfrm>
-          <a:prstGeom prst="rect">
-            <a:avLst/>
-          </a:prstGeom>
-          <a:noFill/>
-          <a:ln/>
-        </p:spPr>
-        <p:txBody>
-          <a:bodyPr wrap="square" lIns="0" tIns="0" rIns="0" bIns="0" rtlCol="0" anchor="ctr"/>
-          <a:lstStyle/>
-          <a:p>
-            <a:pPr algn="r" indent="0" marL="0">
-              <a:buNone/>
-            </a:pPr>
-            <a:r>
-              <a:rPr lang="en-US" sz="900" dirty="0">
-                <a:solidFill>
-                  <a:srgbClr val="5D5D72"/>
-                </a:solidFill>
-                <a:latin typeface="Calibri" pitchFamily="34" charset="0"/>
-                <a:ea typeface="Calibri" pitchFamily="34" charset="-122"/>
-                <a:cs typeface="Calibri" pitchFamily="34" charset="-120"/>
-              </a:rPr>
-              <a:t>5</a:t>
-            </a:r>
-            <a:endParaRPr lang="en-US" sz="900" dirty="0"/>
+          <p:cNvPr id="18" name="cuinotes-footer-mark"/>
+          <p:cNvSpPr txBox="1"/>
+          <p:nvPr/>
+        </p:nvSpPr>
+        <p:spPr>
+          <a:xfrm>
+            <a:off x="9951720" y="6455664"/>
+            <a:ext cx="2011680" cy="292608"/>
+          </a:xfrm>
+          <a:prstGeom prst="rect">
+            <a:avLst/>
+          </a:prstGeom>
+          <a:noFill/>
+        </p:spPr>
+        <p:txBody>
+          <a:bodyPr wrap="none" lIns="0" rIns="0" tIns="0" bIns="0">
+            <a:spAutoFit/>
+          </a:bodyPr>
+          <a:lstStyle/>
+          <a:p>
+            <a:pPr algn="r"/>
+            <a:r>
+              <a:rPr sz="1000">
+                <a:solidFill>
+                  <a:srgbClr val="8A939B"/>
+                </a:solidFill>
+                <a:hlinkClick r:id="rId3"/>
+              </a:rPr>
+              <a:t>cuinotes.com</a:t>
+            </a:r>
+            <a:r>
+              <a:rPr sz="1000">
+                <a:solidFill>
+                  <a:srgbClr val="8A939B"/>
+                </a:solidFill>
+              </a:rPr>
+              <a:t>  ·  5</a:t>
+            </a:r>
           </a:p>
         </p:txBody>
       </p:sp>
@@ -16680,6 +16125,10 @@
             <a:prstDash val="solid"/>
           </a:ln>
         </p:spPr>
+        <p:txBody>
+          <a:bodyPr/>
+          <a:p/>
+        </p:txBody>
       </p:sp>
       <p:sp>
         <p:nvSpPr>
@@ -16831,6 +16280,10 @@
             <a:prstDash val="solid"/>
           </a:ln>
         </p:spPr>
+        <p:txBody>
+          <a:bodyPr/>
+          <a:p/>
+        </p:txBody>
       </p:sp>
       <p:sp>
         <p:nvSpPr>
@@ -16982,6 +16435,10 @@
             <a:prstDash val="solid"/>
           </a:ln>
         </p:spPr>
+        <p:txBody>
+          <a:bodyPr/>
+          <a:p/>
+        </p:txBody>
       </p:sp>
       <p:sp>
         <p:nvSpPr>
@@ -17109,79 +16566,44 @@
       </p:sp>
       <p:sp>
         <p:nvSpPr>
-          <p:cNvPr id="13" name="Text 11"/>
-          <p:cNvSpPr txBox="1"/>
-          <p:nvPr/>
-        </p:nvSpPr>
-        <p:spPr>
-          <a:xfrm>
-            <a:off x="640080" y="6446520"/>
-            <a:ext cx="8686800" cy="292608"/>
-          </a:xfrm>
-          <a:prstGeom prst="rect">
-            <a:avLst/>
-          </a:prstGeom>
-          <a:noFill/>
-          <a:ln/>
-        </p:spPr>
-        <p:txBody>
-          <a:bodyPr wrap="square" lIns="0" tIns="0" rIns="0" bIns="0" rtlCol="0" anchor="ctr"/>
-          <a:lstStyle/>
-          <a:p>
-            <a:pPr algn="l" indent="0" marL="0">
-              <a:buNone/>
-            </a:pPr>
-            <a:r>
-              <a:rPr lang="en-US" sz="900" dirty="0">
-                <a:solidFill>
-                  <a:srgbClr val="5D5D72"/>
-                </a:solidFill>
-                <a:latin typeface="Calibri" pitchFamily="34" charset="0"/>
-                <a:ea typeface="Calibri" pitchFamily="34" charset="-122"/>
-                <a:cs typeface="Calibri" pitchFamily="34" charset="-120"/>
-              </a:rPr>
-              <a:t>Usman Akram  •  COMSATS University Islamabad</a:t>
-            </a:r>
-            <a:endParaRPr lang="en-US" sz="900" dirty="0"/>
-          </a:p>
-        </p:txBody>
-      </p:sp>
-      <p:sp>
-        <p:nvSpPr>
-          <p:cNvPr id="14" name="Text 12"/>
-          <p:cNvSpPr txBox="1"/>
-          <p:nvPr/>
-        </p:nvSpPr>
-        <p:spPr>
-          <a:xfrm>
-            <a:off x="11155680" y="6446520"/>
-            <a:ext cx="457200" cy="292608"/>
-          </a:xfrm>
-          <a:prstGeom prst="rect">
-            <a:avLst/>
-          </a:prstGeom>
-          <a:noFill/>
-          <a:ln/>
-        </p:spPr>
-        <p:txBody>
-          <a:bodyPr wrap="square" lIns="0" tIns="0" rIns="0" bIns="0" rtlCol="0" anchor="ctr"/>
-          <a:lstStyle/>
-          <a:p>
-            <a:pPr algn="r" indent="0" marL="0">
-              <a:buNone/>
-            </a:pPr>
-            <a:r>
-              <a:rPr lang="en-US" sz="900" dirty="0">
-                <a:solidFill>
-                  <a:srgbClr val="5D5D72"/>
-                </a:solidFill>
-                <a:latin typeface="Calibri" pitchFamily="34" charset="0"/>
-                <a:ea typeface="Calibri" pitchFamily="34" charset="-122"/>
-                <a:cs typeface="Calibri" pitchFamily="34" charset="-120"/>
-              </a:rPr>
-              <a:t>6</a:t>
-            </a:r>
-            <a:endParaRPr lang="en-US" sz="900" dirty="0"/>
+          <p:cNvPr id="15" name="cuinotes-footer-mark"/>
+          <p:cNvSpPr txBox="1"/>
+          <p:nvPr/>
+        </p:nvSpPr>
+        <p:spPr>
+          <a:xfrm>
+            <a:off x="9951720" y="6455664"/>
+            <a:ext cx="2011680" cy="292608"/>
+          </a:xfrm>
+          <a:prstGeom prst="rect">
+            <a:avLst/>
+          </a:prstGeom>
+          <a:noFill/>
+        </p:spPr>
+        <p:txBody>
+          <a:bodyPr wrap="none" lIns="0" rIns="0" tIns="0" bIns="0">
+            <a:spAutoFit/>
+          </a:bodyPr>
+          <a:lstStyle/>
+          <a:p>
+            <a:pPr algn="r"/>
+            <a:r>
+              <a:rPr sz="1000">
+                <a:solidFill>
+                  <a:srgbClr val="8A939B"/>
+                </a:solidFill>
+                <a:hlinkClick r:id="rId3"/>
+              </a:rPr>
+              <a:t>cuinotes.com</a:t>
+            </a:r>
+            <a:r>
+              <a:rPr sz="1000">
+                <a:solidFill>
+                  <a:srgbClr val="8A939B"/>
+                </a:solidFill>
+              </a:rPr>
+              <a:t>  ·  6</a:t>
+            </a:r>
           </a:p>
         </p:txBody>
       </p:sp>
@@ -17314,6 +16736,10 @@
           </a:solidFill>
           <a:ln/>
         </p:spPr>
+        <p:txBody>
+          <a:bodyPr/>
+          <a:p/>
+        </p:txBody>
       </p:sp>
       <p:sp>
         <p:nvSpPr>
@@ -17412,6 +16838,10 @@
           </a:solidFill>
           <a:ln/>
         </p:spPr>
+        <p:txBody>
+          <a:bodyPr/>
+          <a:p/>
+        </p:txBody>
       </p:sp>
       <p:sp>
         <p:nvSpPr>
@@ -17510,6 +16940,10 @@
           </a:solidFill>
           <a:ln/>
         </p:spPr>
+        <p:txBody>
+          <a:bodyPr/>
+          <a:p/>
+        </p:txBody>
       </p:sp>
       <p:sp>
         <p:nvSpPr>
@@ -17591,79 +17025,44 @@
       </p:sp>
       <p:sp>
         <p:nvSpPr>
-          <p:cNvPr id="13" name="Text 11"/>
-          <p:cNvSpPr txBox="1"/>
-          <p:nvPr/>
-        </p:nvSpPr>
-        <p:spPr>
-          <a:xfrm>
-            <a:off x="640080" y="6446520"/>
-            <a:ext cx="8686800" cy="292608"/>
-          </a:xfrm>
-          <a:prstGeom prst="rect">
-            <a:avLst/>
-          </a:prstGeom>
-          <a:noFill/>
-          <a:ln/>
-        </p:spPr>
-        <p:txBody>
-          <a:bodyPr wrap="square" lIns="0" tIns="0" rIns="0" bIns="0" rtlCol="0" anchor="ctr"/>
-          <a:lstStyle/>
-          <a:p>
-            <a:pPr algn="l" indent="0" marL="0">
-              <a:buNone/>
-            </a:pPr>
-            <a:r>
-              <a:rPr lang="en-US" sz="900" dirty="0">
-                <a:solidFill>
-                  <a:srgbClr val="5D5D72"/>
-                </a:solidFill>
-                <a:latin typeface="Calibri" pitchFamily="34" charset="0"/>
-                <a:ea typeface="Calibri" pitchFamily="34" charset="-122"/>
-                <a:cs typeface="Calibri" pitchFamily="34" charset="-120"/>
-              </a:rPr>
-              <a:t>Usman Akram  •  COMSATS University Islamabad</a:t>
-            </a:r>
-            <a:endParaRPr lang="en-US" sz="900" dirty="0"/>
-          </a:p>
-        </p:txBody>
-      </p:sp>
-      <p:sp>
-        <p:nvSpPr>
-          <p:cNvPr id="14" name="Text 12"/>
-          <p:cNvSpPr txBox="1"/>
-          <p:nvPr/>
-        </p:nvSpPr>
-        <p:spPr>
-          <a:xfrm>
-            <a:off x="11155680" y="6446520"/>
-            <a:ext cx="457200" cy="292608"/>
-          </a:xfrm>
-          <a:prstGeom prst="rect">
-            <a:avLst/>
-          </a:prstGeom>
-          <a:noFill/>
-          <a:ln/>
-        </p:spPr>
-        <p:txBody>
-          <a:bodyPr wrap="square" lIns="0" tIns="0" rIns="0" bIns="0" rtlCol="0" anchor="ctr"/>
-          <a:lstStyle/>
-          <a:p>
-            <a:pPr algn="r" indent="0" marL="0">
-              <a:buNone/>
-            </a:pPr>
-            <a:r>
-              <a:rPr lang="en-US" sz="900" dirty="0">
-                <a:solidFill>
-                  <a:srgbClr val="5D5D72"/>
-                </a:solidFill>
-                <a:latin typeface="Calibri" pitchFamily="34" charset="0"/>
-                <a:ea typeface="Calibri" pitchFamily="34" charset="-122"/>
-                <a:cs typeface="Calibri" pitchFamily="34" charset="-120"/>
-              </a:rPr>
-              <a:t>7</a:t>
-            </a:r>
-            <a:endParaRPr lang="en-US" sz="900" dirty="0"/>
+          <p:cNvPr id="15" name="cuinotes-footer-mark"/>
+          <p:cNvSpPr txBox="1"/>
+          <p:nvPr/>
+        </p:nvSpPr>
+        <p:spPr>
+          <a:xfrm>
+            <a:off x="9951720" y="6455664"/>
+            <a:ext cx="2011680" cy="292608"/>
+          </a:xfrm>
+          <a:prstGeom prst="rect">
+            <a:avLst/>
+          </a:prstGeom>
+          <a:noFill/>
+        </p:spPr>
+        <p:txBody>
+          <a:bodyPr wrap="none" lIns="0" rIns="0" tIns="0" bIns="0">
+            <a:spAutoFit/>
+          </a:bodyPr>
+          <a:lstStyle/>
+          <a:p>
+            <a:pPr algn="r"/>
+            <a:r>
+              <a:rPr sz="1000">
+                <a:solidFill>
+                  <a:srgbClr val="8A939B"/>
+                </a:solidFill>
+                <a:hlinkClick r:id="rId3"/>
+              </a:rPr>
+              <a:t>cuinotes.com</a:t>
+            </a:r>
+            <a:r>
+              <a:rPr sz="1000">
+                <a:solidFill>
+                  <a:srgbClr val="8A939B"/>
+                </a:solidFill>
+              </a:rPr>
+              <a:t>  ·  7</a:t>
+            </a:r>
           </a:p>
         </p:txBody>
       </p:sp>
@@ -18499,79 +17898,44 @@
       </p:graphicFrame>
       <p:sp>
         <p:nvSpPr>
-          <p:cNvPr id="5" name="Text 2"/>
-          <p:cNvSpPr txBox="1"/>
-          <p:nvPr/>
-        </p:nvSpPr>
-        <p:spPr>
-          <a:xfrm>
-            <a:off x="640080" y="6446520"/>
-            <a:ext cx="8686800" cy="292608"/>
-          </a:xfrm>
-          <a:prstGeom prst="rect">
-            <a:avLst/>
-          </a:prstGeom>
-          <a:noFill/>
-          <a:ln/>
-        </p:spPr>
-        <p:txBody>
-          <a:bodyPr wrap="square" lIns="0" tIns="0" rIns="0" bIns="0" rtlCol="0" anchor="ctr"/>
-          <a:lstStyle/>
-          <a:p>
-            <a:pPr algn="l" indent="0" marL="0">
-              <a:buNone/>
-            </a:pPr>
-            <a:r>
-              <a:rPr lang="en-US" sz="900" dirty="0">
-                <a:solidFill>
-                  <a:srgbClr val="5D5D72"/>
-                </a:solidFill>
-                <a:latin typeface="Calibri" pitchFamily="34" charset="0"/>
-                <a:ea typeface="Calibri" pitchFamily="34" charset="-122"/>
-                <a:cs typeface="Calibri" pitchFamily="34" charset="-120"/>
-              </a:rPr>
-              <a:t>Usman Akram  •  COMSATS University Islamabad</a:t>
-            </a:r>
-            <a:endParaRPr lang="en-US" sz="900" dirty="0"/>
-          </a:p>
-        </p:txBody>
-      </p:sp>
-      <p:sp>
-        <p:nvSpPr>
-          <p:cNvPr id="6" name="Text 3"/>
-          <p:cNvSpPr txBox="1"/>
-          <p:nvPr/>
-        </p:nvSpPr>
-        <p:spPr>
-          <a:xfrm>
-            <a:off x="11155680" y="6446520"/>
-            <a:ext cx="457200" cy="292608"/>
-          </a:xfrm>
-          <a:prstGeom prst="rect">
-            <a:avLst/>
-          </a:prstGeom>
-          <a:noFill/>
-          <a:ln/>
-        </p:spPr>
-        <p:txBody>
-          <a:bodyPr wrap="square" lIns="0" tIns="0" rIns="0" bIns="0" rtlCol="0" anchor="ctr"/>
-          <a:lstStyle/>
-          <a:p>
-            <a:pPr algn="r" indent="0" marL="0">
-              <a:buNone/>
-            </a:pPr>
-            <a:r>
-              <a:rPr lang="en-US" sz="900" dirty="0">
-                <a:solidFill>
-                  <a:srgbClr val="5D5D72"/>
-                </a:solidFill>
-                <a:latin typeface="Calibri" pitchFamily="34" charset="0"/>
-                <a:ea typeface="Calibri" pitchFamily="34" charset="-122"/>
-                <a:cs typeface="Calibri" pitchFamily="34" charset="-120"/>
-              </a:rPr>
-              <a:t>8</a:t>
-            </a:r>
-            <a:endParaRPr lang="en-US" sz="900" dirty="0"/>
+          <p:cNvPr id="10" name="cuinotes-footer-mark"/>
+          <p:cNvSpPr txBox="1"/>
+          <p:nvPr/>
+        </p:nvSpPr>
+        <p:spPr>
+          <a:xfrm>
+            <a:off x="9951720" y="6455664"/>
+            <a:ext cx="2011680" cy="292608"/>
+          </a:xfrm>
+          <a:prstGeom prst="rect">
+            <a:avLst/>
+          </a:prstGeom>
+          <a:noFill/>
+        </p:spPr>
+        <p:txBody>
+          <a:bodyPr wrap="none" lIns="0" rIns="0" tIns="0" bIns="0">
+            <a:spAutoFit/>
+          </a:bodyPr>
+          <a:lstStyle/>
+          <a:p>
+            <a:pPr algn="r"/>
+            <a:r>
+              <a:rPr sz="1000">
+                <a:solidFill>
+                  <a:srgbClr val="8A939B"/>
+                </a:solidFill>
+                <a:hlinkClick r:id="rId3"/>
+              </a:rPr>
+              <a:t>cuinotes.com</a:t>
+            </a:r>
+            <a:r>
+              <a:rPr sz="1000">
+                <a:solidFill>
+                  <a:srgbClr val="8A939B"/>
+                </a:solidFill>
+              </a:rPr>
+              <a:t>  ·  8</a:t>
+            </a:r>
           </a:p>
         </p:txBody>
       </p:sp>
@@ -18711,6 +18075,10 @@
             <a:prstDash val="solid"/>
           </a:ln>
         </p:spPr>
+        <p:txBody>
+          <a:bodyPr/>
+          <a:p/>
+        </p:txBody>
       </p:sp>
       <p:sp>
         <p:nvSpPr>
@@ -18792,79 +18160,44 @@
       </p:sp>
       <p:sp>
         <p:nvSpPr>
-          <p:cNvPr id="7" name="Text 5"/>
-          <p:cNvSpPr txBox="1"/>
-          <p:nvPr/>
-        </p:nvSpPr>
-        <p:spPr>
-          <a:xfrm>
-            <a:off x="640080" y="6446520"/>
-            <a:ext cx="8686800" cy="292608"/>
-          </a:xfrm>
-          <a:prstGeom prst="rect">
-            <a:avLst/>
-          </a:prstGeom>
-          <a:noFill/>
-          <a:ln/>
-        </p:spPr>
-        <p:txBody>
-          <a:bodyPr wrap="square" lIns="0" tIns="0" rIns="0" bIns="0" rtlCol="0" anchor="ctr"/>
-          <a:lstStyle/>
-          <a:p>
-            <a:pPr algn="l" indent="0" marL="0">
-              <a:buNone/>
-            </a:pPr>
-            <a:r>
-              <a:rPr lang="en-US" sz="900" dirty="0">
-                <a:solidFill>
-                  <a:srgbClr val="5D5D72"/>
-                </a:solidFill>
-                <a:latin typeface="Calibri" pitchFamily="34" charset="0"/>
-                <a:ea typeface="Calibri" pitchFamily="34" charset="-122"/>
-                <a:cs typeface="Calibri" pitchFamily="34" charset="-120"/>
-              </a:rPr>
-              <a:t>Usman Akram  •  COMSATS University Islamabad</a:t>
-            </a:r>
-            <a:endParaRPr lang="en-US" sz="900" dirty="0"/>
-          </a:p>
-        </p:txBody>
-      </p:sp>
-      <p:sp>
-        <p:nvSpPr>
-          <p:cNvPr id="8" name="Text 6"/>
-          <p:cNvSpPr txBox="1"/>
-          <p:nvPr/>
-        </p:nvSpPr>
-        <p:spPr>
-          <a:xfrm>
-            <a:off x="11155680" y="6446520"/>
-            <a:ext cx="457200" cy="292608"/>
-          </a:xfrm>
-          <a:prstGeom prst="rect">
-            <a:avLst/>
-          </a:prstGeom>
-          <a:noFill/>
-          <a:ln/>
-        </p:spPr>
-        <p:txBody>
-          <a:bodyPr wrap="square" lIns="0" tIns="0" rIns="0" bIns="0" rtlCol="0" anchor="ctr"/>
-          <a:lstStyle/>
-          <a:p>
-            <a:pPr algn="r" indent="0" marL="0">
-              <a:buNone/>
-            </a:pPr>
-            <a:r>
-              <a:rPr lang="en-US" sz="900" dirty="0">
-                <a:solidFill>
-                  <a:srgbClr val="5D5D72"/>
-                </a:solidFill>
-                <a:latin typeface="Calibri" pitchFamily="34" charset="0"/>
-                <a:ea typeface="Calibri" pitchFamily="34" charset="-122"/>
-                <a:cs typeface="Calibri" pitchFamily="34" charset="-120"/>
-              </a:rPr>
-              <a:t>9</a:t>
-            </a:r>
-            <a:endParaRPr lang="en-US" sz="900" dirty="0"/>
+          <p:cNvPr id="9" name="cuinotes-footer-mark"/>
+          <p:cNvSpPr txBox="1"/>
+          <p:nvPr/>
+        </p:nvSpPr>
+        <p:spPr>
+          <a:xfrm>
+            <a:off x="9951720" y="6455664"/>
+            <a:ext cx="2011680" cy="292608"/>
+          </a:xfrm>
+          <a:prstGeom prst="rect">
+            <a:avLst/>
+          </a:prstGeom>
+          <a:noFill/>
+        </p:spPr>
+        <p:txBody>
+          <a:bodyPr wrap="none" lIns="0" rIns="0" tIns="0" bIns="0">
+            <a:spAutoFit/>
+          </a:bodyPr>
+          <a:lstStyle/>
+          <a:p>
+            <a:pPr algn="r"/>
+            <a:r>
+              <a:rPr sz="1000">
+                <a:solidFill>
+                  <a:srgbClr val="8A939B"/>
+                </a:solidFill>
+                <a:hlinkClick r:id="rId3"/>
+              </a:rPr>
+              <a:t>cuinotes.com</a:t>
+            </a:r>
+            <a:r>
+              <a:rPr sz="1000">
+                <a:solidFill>
+                  <a:srgbClr val="8A939B"/>
+                </a:solidFill>
+              </a:rPr>
+              <a:t>  ·  9</a:t>
+            </a:r>
           </a:p>
         </p:txBody>
       </p:sp>

--- a/slides/CSC336-Lecture-30-Application-Security-Basics.pptx
+++ b/slides/CSC336-Lecture-30-Application-Security-Basics.pptx
@@ -7341,7 +7341,7 @@
         <p:spPr>
           <a:xfrm>
             <a:off x="640080" y="1965960"/>
-            <a:ext cx="10911535" cy="1645920"/>
+            <a:ext cx="10911535" cy="3657600"/>
           </a:xfrm>
           <a:prstGeom prst="roundRect">
             <a:avLst>
@@ -7372,7 +7372,7 @@
         <p:spPr>
           <a:xfrm>
             <a:off x="868680" y="2103120"/>
-            <a:ext cx="10454335" cy="274320"/>
+            <a:ext cx="10454335" cy="400000"/>
           </a:xfrm>
           <a:prstGeom prst="rect">
             <a:avLst/>
@@ -7388,7 +7388,7 @@
               <a:buNone/>
             </a:pPr>
             <a:r>
-              <a:rPr lang="en-US" sz="1000" b="1" spc="200" kern="0" dirty="0">
+              <a:rPr lang="en-US" sz="1800" b="1" spc="200" kern="0" dirty="0">
                 <a:solidFill>
                   <a:srgbClr val="1F7A46"/>
                 </a:solidFill>
@@ -7398,7 +7398,7 @@
               </a:rPr>
               <a:t>TIP</a:t>
             </a:r>
-            <a:endParaRPr lang="en-US" sz="1000" dirty="0"/>
+            <a:endParaRPr lang="en-US" sz="1800" dirty="0"/>
           </a:p>
         </p:txBody>
       </p:sp>
@@ -7410,24 +7410,24 @@
         </p:nvSpPr>
         <p:spPr>
           <a:xfrm>
-            <a:off x="868680" y="2404872"/>
-            <a:ext cx="10454335" cy="1051560"/>
-          </a:xfrm>
-          <a:prstGeom prst="rect">
-            <a:avLst/>
-          </a:prstGeom>
-          <a:noFill/>
-          <a:ln/>
-        </p:spPr>
-        <p:txBody>
-          <a:bodyPr wrap="square" lIns="0" tIns="0" rIns="0" bIns="0" rtlCol="0" anchor="t"/>
+            <a:off x="868680" y="2795960"/>
+            <a:ext cx="10454335" cy="2500000"/>
+          </a:xfrm>
+          <a:prstGeom prst="rect">
+            <a:avLst/>
+          </a:prstGeom>
+          <a:noFill/>
+          <a:ln/>
+        </p:spPr>
+        <p:txBody>
+          <a:bodyPr wrap="square" lIns="0" tIns="0" rIns="0" bIns="0" rtlCol="0" anchor="ctr"/>
           <a:lstStyle/>
           <a:p>
             <a:pPr indent="0" marL="0">
               <a:buNone/>
             </a:pPr>
             <a:r>
-              <a:rPr lang="en-US" sz="1250" dirty="0">
+              <a:rPr lang="en-US" sz="2800" dirty="0">
                 <a:solidFill>
                   <a:srgbClr val="26262F"/>
                 </a:solidFill>
@@ -7437,7 +7437,7 @@
               </a:rPr>
               <a:t>Free, automated certificate services like Let's Encrypt made HTTPS free and easy, which is why almost the entire web uses it by default. Most hosting platforms (Lecture 32) issue and renew certificates for you automatically.</a:t>
             </a:r>
-            <a:endParaRPr lang="en-US" sz="1250" dirty="0"/>
+            <a:endParaRPr lang="en-US" sz="2800" dirty="0"/>
           </a:p>
         </p:txBody>
       </p:sp>
@@ -8484,9 +8484,13 @@
             </a:avLst>
           </a:prstGeom>
           <a:solidFill>
-            <a:srgbClr val="1E1E4C"/>
+            <a:srgbClr val="F7F8F9"/>
           </a:solidFill>
-          <a:ln/>
+          <a:ln w="9525">
+            <a:solidFill>
+              <a:srgbClr val="D0D5DD"/>
+            </a:solidFill>
+          </a:ln>
         </p:spPr>
         <p:txBody>
           <a:bodyPr/>
@@ -8523,7 +8527,7 @@
             <a:r>
               <a:rPr lang="en-US" sz="1400" dirty="0">
                 <a:solidFill>
-                  <a:srgbClr val="C9D3F5"/>
+                  <a:srgbClr val="1F2429"/>
                 </a:solidFill>
                 <a:latin typeface="Courier New" pitchFamily="34" charset="0"/>
                 <a:ea typeface="Courier New" pitchFamily="34" charset="-122"/>
@@ -8543,7 +8547,7 @@
             <a:r>
               <a:rPr lang="en-US" sz="1400" dirty="0">
                 <a:solidFill>
-                  <a:srgbClr val="C9D3F5"/>
+                  <a:srgbClr val="1F2429"/>
                 </a:solidFill>
                 <a:latin typeface="Courier New" pitchFamily="34" charset="0"/>
                 <a:ea typeface="Courier New" pitchFamily="34" charset="-122"/>
@@ -8572,7 +8576,7 @@
             <a:r>
               <a:rPr lang="en-US" sz="1400" dirty="0">
                 <a:solidFill>
-                  <a:srgbClr val="C9D3F5"/>
+                  <a:srgbClr val="1F2429"/>
                 </a:solidFill>
                 <a:latin typeface="Courier New" pitchFamily="34" charset="0"/>
                 <a:ea typeface="Courier New" pitchFamily="34" charset="-122"/>
@@ -8592,7 +8596,7 @@
             <a:r>
               <a:rPr lang="en-US" sz="1400" dirty="0">
                 <a:solidFill>
-                  <a:srgbClr val="C9D3F5"/>
+                  <a:srgbClr val="1F2429"/>
                 </a:solidFill>
                 <a:latin typeface="Courier New" pitchFamily="34" charset="0"/>
                 <a:ea typeface="Courier New" pitchFamily="34" charset="-122"/>
@@ -10884,7 +10888,7 @@
         <p:spPr>
           <a:xfrm>
             <a:off x="640080" y="1965960"/>
-            <a:ext cx="10911535" cy="1371600"/>
+            <a:ext cx="10911535" cy="2330000"/>
           </a:xfrm>
           <a:prstGeom prst="roundRect">
             <a:avLst>
@@ -10915,7 +10919,7 @@
         <p:spPr>
           <a:xfrm>
             <a:off x="868680" y="2103120"/>
-            <a:ext cx="10454335" cy="274320"/>
+            <a:ext cx="10454335" cy="400000"/>
           </a:xfrm>
           <a:prstGeom prst="rect">
             <a:avLst/>
@@ -10931,7 +10935,7 @@
               <a:buNone/>
             </a:pPr>
             <a:r>
-              <a:rPr lang="en-US" sz="1000" b="1" spc="200" kern="0" dirty="0">
+              <a:rPr lang="en-US" sz="1800" b="1" spc="200" kern="0" dirty="0">
                 <a:solidFill>
                   <a:srgbClr val="8A3A12"/>
                 </a:solidFill>
@@ -10941,7 +10945,7 @@
               </a:rPr>
               <a:t>WARNING</a:t>
             </a:r>
-            <a:endParaRPr lang="en-US" sz="1000" dirty="0"/>
+            <a:endParaRPr lang="en-US" sz="1800" dirty="0"/>
           </a:p>
         </p:txBody>
       </p:sp>
@@ -10953,24 +10957,24 @@
         </p:nvSpPr>
         <p:spPr>
           <a:xfrm>
-            <a:off x="868680" y="2404872"/>
-            <a:ext cx="10454335" cy="777240"/>
-          </a:xfrm>
-          <a:prstGeom prst="rect">
-            <a:avLst/>
-          </a:prstGeom>
-          <a:noFill/>
-          <a:ln/>
-        </p:spPr>
-        <p:txBody>
-          <a:bodyPr wrap="square" lIns="0" tIns="0" rIns="0" bIns="0" rtlCol="0" anchor="t"/>
+            <a:off x="868680" y="2795960"/>
+            <a:ext cx="10454335" cy="1200000"/>
+          </a:xfrm>
+          <a:prstGeom prst="rect">
+            <a:avLst/>
+          </a:prstGeom>
+          <a:noFill/>
+          <a:ln/>
+        </p:spPr>
+        <p:txBody>
+          <a:bodyPr wrap="square" lIns="0" tIns="0" rIns="0" bIns="0" rtlCol="0" anchor="ctr"/>
           <a:lstStyle/>
           <a:p>
             <a:pPr indent="0" marL="0">
               <a:buNone/>
             </a:pPr>
             <a:r>
-              <a:rPr lang="en-US" sz="1250" dirty="0">
+              <a:rPr lang="en-US" sz="2800" dirty="0">
                 <a:solidFill>
                   <a:srgbClr val="26262F"/>
                 </a:solidFill>
@@ -10980,7 +10984,7 @@
               </a:rPr>
               <a:t>This exact mistake — authenticated but not authorized — is common enough to have its own name: broken access control, covered in Lecture 31.</a:t>
             </a:r>
-            <a:endParaRPr lang="en-US" sz="1250" dirty="0"/>
+            <a:endParaRPr lang="en-US" sz="2800" dirty="0"/>
           </a:p>
         </p:txBody>
       </p:sp>
@@ -10992,7 +10996,7 @@
         </p:nvSpPr>
         <p:spPr>
           <a:xfrm>
-            <a:off x="640080" y="3611880"/>
+            <a:off x="640080" y="4570280"/>
             <a:ext cx="10911535" cy="2286000"/>
           </a:xfrm>
           <a:prstGeom prst="rect">
@@ -11652,9 +11656,13 @@
             </a:avLst>
           </a:prstGeom>
           <a:solidFill>
-            <a:srgbClr val="1E1E4C"/>
+            <a:srgbClr val="F7F8F9"/>
           </a:solidFill>
-          <a:ln/>
+          <a:ln w="9525">
+            <a:solidFill>
+              <a:srgbClr val="D0D5DD"/>
+            </a:solidFill>
+          </a:ln>
         </p:spPr>
         <p:txBody>
           <a:bodyPr/>
@@ -11691,7 +11699,7 @@
             <a:r>
               <a:rPr lang="en-US" sz="1029" dirty="0">
                 <a:solidFill>
-                  <a:srgbClr val="C9D3F5"/>
+                  <a:srgbClr val="1F2429"/>
                 </a:solidFill>
                 <a:latin typeface="Courier New" pitchFamily="34" charset="0"/>
                 <a:ea typeface="Courier New" pitchFamily="34" charset="-122"/>
@@ -11711,7 +11719,7 @@
             <a:r>
               <a:rPr lang="en-US" sz="1029" dirty="0">
                 <a:solidFill>
-                  <a:srgbClr val="C9D3F5"/>
+                  <a:srgbClr val="1F2429"/>
                 </a:solidFill>
                 <a:latin typeface="Courier New" pitchFamily="34" charset="0"/>
                 <a:ea typeface="Courier New" pitchFamily="34" charset="-122"/>
@@ -11740,7 +11748,7 @@
             <a:r>
               <a:rPr lang="en-US" sz="1029" dirty="0">
                 <a:solidFill>
-                  <a:srgbClr val="C9D3F5"/>
+                  <a:srgbClr val="1F2429"/>
                 </a:solidFill>
                 <a:latin typeface="Courier New" pitchFamily="34" charset="0"/>
                 <a:ea typeface="Courier New" pitchFamily="34" charset="-122"/>
@@ -11760,7 +11768,7 @@
             <a:r>
               <a:rPr lang="en-US" sz="1029" dirty="0">
                 <a:solidFill>
-                  <a:srgbClr val="C9D3F5"/>
+                  <a:srgbClr val="1F2429"/>
                 </a:solidFill>
                 <a:latin typeface="Courier New" pitchFamily="34" charset="0"/>
                 <a:ea typeface="Courier New" pitchFamily="34" charset="-122"/>
@@ -11780,7 +11788,7 @@
             <a:r>
               <a:rPr lang="en-US" sz="1029" dirty="0">
                 <a:solidFill>
-                  <a:srgbClr val="C9D3F5"/>
+                  <a:srgbClr val="1F2429"/>
                 </a:solidFill>
                 <a:latin typeface="Courier New" pitchFamily="34" charset="0"/>
                 <a:ea typeface="Courier New" pitchFamily="34" charset="-122"/>
@@ -11809,7 +11817,7 @@
             <a:r>
               <a:rPr lang="en-US" sz="1029" dirty="0">
                 <a:solidFill>
-                  <a:srgbClr val="C9D3F5"/>
+                  <a:srgbClr val="1F2429"/>
                 </a:solidFill>
                 <a:latin typeface="Courier New" pitchFamily="34" charset="0"/>
                 <a:ea typeface="Courier New" pitchFamily="34" charset="-122"/>
@@ -11829,7 +11837,7 @@
             <a:r>
               <a:rPr lang="en-US" sz="1029" dirty="0">
                 <a:solidFill>
-                  <a:srgbClr val="C9D3F5"/>
+                  <a:srgbClr val="1F2429"/>
                 </a:solidFill>
                 <a:latin typeface="Courier New" pitchFamily="34" charset="0"/>
                 <a:ea typeface="Courier New" pitchFamily="34" charset="-122"/>
@@ -11849,7 +11857,7 @@
             <a:r>
               <a:rPr lang="en-US" sz="1029" dirty="0">
                 <a:solidFill>
-                  <a:srgbClr val="C9D3F5"/>
+                  <a:srgbClr val="1F2429"/>
                 </a:solidFill>
                 <a:latin typeface="Courier New" pitchFamily="34" charset="0"/>
                 <a:ea typeface="Courier New" pitchFamily="34" charset="-122"/>
@@ -11869,7 +11877,7 @@
             <a:r>
               <a:rPr lang="en-US" sz="1029" dirty="0">
                 <a:solidFill>
-                  <a:srgbClr val="C9D3F5"/>
+                  <a:srgbClr val="1F2429"/>
                 </a:solidFill>
                 <a:latin typeface="Courier New" pitchFamily="34" charset="0"/>
                 <a:ea typeface="Courier New" pitchFamily="34" charset="-122"/>
@@ -11898,7 +11906,7 @@
             <a:r>
               <a:rPr lang="en-US" sz="1029" dirty="0">
                 <a:solidFill>
-                  <a:srgbClr val="C9D3F5"/>
+                  <a:srgbClr val="1F2429"/>
                 </a:solidFill>
                 <a:latin typeface="Courier New" pitchFamily="34" charset="0"/>
                 <a:ea typeface="Courier New" pitchFamily="34" charset="-122"/>
@@ -11918,7 +11926,7 @@
             <a:r>
               <a:rPr lang="en-US" sz="1029" dirty="0">
                 <a:solidFill>
-                  <a:srgbClr val="C9D3F5"/>
+                  <a:srgbClr val="1F2429"/>
                 </a:solidFill>
                 <a:latin typeface="Courier New" pitchFamily="34" charset="0"/>
                 <a:ea typeface="Courier New" pitchFamily="34" charset="-122"/>
@@ -12131,7 +12139,7 @@
         <p:spPr>
           <a:xfrm>
             <a:off x="640080" y="1965960"/>
-            <a:ext cx="10911535" cy="1737360"/>
+            <a:ext cx="10911535" cy="3657600"/>
           </a:xfrm>
           <a:prstGeom prst="roundRect">
             <a:avLst>
@@ -12162,7 +12170,7 @@
         <p:spPr>
           <a:xfrm>
             <a:off x="868680" y="2103120"/>
-            <a:ext cx="10454335" cy="274320"/>
+            <a:ext cx="10454335" cy="400000"/>
           </a:xfrm>
           <a:prstGeom prst="rect">
             <a:avLst/>
@@ -12178,7 +12186,7 @@
               <a:buNone/>
             </a:pPr>
             <a:r>
-              <a:rPr lang="en-US" sz="1000" b="1" spc="200" kern="0" dirty="0">
+              <a:rPr lang="en-US" sz="1800" b="1" spc="200" kern="0" dirty="0">
                 <a:solidFill>
                   <a:srgbClr val="8A3A12"/>
                 </a:solidFill>
@@ -12188,7 +12196,7 @@
               </a:rPr>
               <a:t>WARNING</a:t>
             </a:r>
-            <a:endParaRPr lang="en-US" sz="1000" dirty="0"/>
+            <a:endParaRPr lang="en-US" sz="1800" dirty="0"/>
           </a:p>
         </p:txBody>
       </p:sp>
@@ -12200,24 +12208,24 @@
         </p:nvSpPr>
         <p:spPr>
           <a:xfrm>
-            <a:off x="868680" y="2404872"/>
-            <a:ext cx="10454335" cy="1143000"/>
-          </a:xfrm>
-          <a:prstGeom prst="rect">
-            <a:avLst/>
-          </a:prstGeom>
-          <a:noFill/>
-          <a:ln/>
-        </p:spPr>
-        <p:txBody>
-          <a:bodyPr wrap="square" lIns="0" tIns="0" rIns="0" bIns="0" rtlCol="0" anchor="t"/>
+            <a:off x="868680" y="2795960"/>
+            <a:ext cx="10454335" cy="2500000"/>
+          </a:xfrm>
+          <a:prstGeom prst="rect">
+            <a:avLst/>
+          </a:prstGeom>
+          <a:noFill/>
+          <a:ln/>
+        </p:spPr>
+        <p:txBody>
+          <a:bodyPr wrap="square" lIns="0" tIns="0" rIns="0" bIns="0" rtlCol="0" anchor="ctr"/>
           <a:lstStyle/>
           <a:p>
             <a:pPr indent="0" marL="0">
               <a:buNone/>
             </a:pPr>
             <a:r>
-              <a:rPr lang="en-US" sz="1250" dirty="0">
+              <a:rPr lang="en-US" sz="2800" dirty="0">
                 <a:solidFill>
                   <a:srgbClr val="26262F"/>
                 </a:solidFill>
@@ -12227,7 +12235,7 @@
               </a:rPr>
               <a:t>React form validation gives instant feedback with zero network round trip — but it runs on the attacker's own computer, where they can disable or bypass it entirely. Always re-validate on the server too. Server-side validation is the real security boundary.</a:t>
             </a:r>
-            <a:endParaRPr lang="en-US" sz="1250" dirty="0"/>
+            <a:endParaRPr lang="en-US" sz="2800" dirty="0"/>
           </a:p>
         </p:txBody>
       </p:sp>
@@ -13311,7 +13319,7 @@
         <p:spPr>
           <a:xfrm>
             <a:off x="640080" y="1965960"/>
-            <a:ext cx="10911535" cy="1737360"/>
+            <a:ext cx="10911535" cy="3657600"/>
           </a:xfrm>
           <a:prstGeom prst="roundRect">
             <a:avLst>
@@ -13342,7 +13350,7 @@
         <p:spPr>
           <a:xfrm>
             <a:off x="868680" y="2103120"/>
-            <a:ext cx="10454335" cy="274320"/>
+            <a:ext cx="10454335" cy="400000"/>
           </a:xfrm>
           <a:prstGeom prst="rect">
             <a:avLst/>
@@ -13358,7 +13366,7 @@
               <a:buNone/>
             </a:pPr>
             <a:r>
-              <a:rPr lang="en-US" sz="1000" b="1" spc="200" kern="0" dirty="0">
+              <a:rPr lang="en-US" sz="1800" b="1" spc="200" kern="0" dirty="0">
                 <a:solidFill>
                   <a:srgbClr val="8A3A12"/>
                 </a:solidFill>
@@ -13368,7 +13376,7 @@
               </a:rPr>
               <a:t>WARNING</a:t>
             </a:r>
-            <a:endParaRPr lang="en-US" sz="1000" dirty="0"/>
+            <a:endParaRPr lang="en-US" sz="1800" dirty="0"/>
           </a:p>
         </p:txBody>
       </p:sp>
@@ -13380,24 +13388,24 @@
         </p:nvSpPr>
         <p:spPr>
           <a:xfrm>
-            <a:off x="868680" y="2404872"/>
-            <a:ext cx="10454335" cy="1143000"/>
-          </a:xfrm>
-          <a:prstGeom prst="rect">
-            <a:avLst/>
-          </a:prstGeom>
-          <a:noFill/>
-          <a:ln/>
-        </p:spPr>
-        <p:txBody>
-          <a:bodyPr wrap="square" lIns="0" tIns="0" rIns="0" bIns="0" rtlCol="0" anchor="t"/>
+            <a:off x="868680" y="2795960"/>
+            <a:ext cx="10454335" cy="2500000"/>
+          </a:xfrm>
+          <a:prstGeom prst="rect">
+            <a:avLst/>
+          </a:prstGeom>
+          <a:noFill/>
+          <a:ln/>
+        </p:spPr>
+        <p:txBody>
+          <a:bodyPr wrap="square" lIns="0" tIns="0" rIns="0" bIns="0" rtlCol="0" anchor="ctr"/>
           <a:lstStyle/>
           <a:p>
             <a:pPr indent="0" marL="0">
               <a:buNone/>
             </a:pPr>
             <a:r>
-              <a:rPr lang="en-US" sz="1250" dirty="0">
+              <a:rPr lang="en-US" sz="2800" dirty="0">
                 <a:solidFill>
                   <a:srgbClr val="26262F"/>
                 </a:solidFill>
@@ -13407,7 +13415,7 @@
               </a:rPr>
               <a:t>One of the most common and damaging mistakes: committing a .env file or hard-coded API key, especially to a public GitHub repo. Automated bots scan public repos for exposed keys within minutes of a push. If one leaks, rotate it — generate a brand-new secret and revoke the old one.</a:t>
             </a:r>
-            <a:endParaRPr lang="en-US" sz="1250" dirty="0"/>
+            <a:endParaRPr lang="en-US" sz="2800" dirty="0"/>
           </a:p>
         </p:txBody>
       </p:sp>
@@ -13581,9 +13589,13 @@
             </a:avLst>
           </a:prstGeom>
           <a:solidFill>
-            <a:srgbClr val="1E1E4C"/>
+            <a:srgbClr val="F7F8F9"/>
           </a:solidFill>
-          <a:ln/>
+          <a:ln w="9525">
+            <a:solidFill>
+              <a:srgbClr val="D0D5DD"/>
+            </a:solidFill>
+          </a:ln>
         </p:spPr>
         <p:txBody>
           <a:bodyPr/>
@@ -13620,7 +13632,7 @@
             <a:r>
               <a:rPr lang="en-US" sz="1400" dirty="0">
                 <a:solidFill>
-                  <a:srgbClr val="C9D3F5"/>
+                  <a:srgbClr val="1F2429"/>
                 </a:solidFill>
                 <a:latin typeface="Courier New" pitchFamily="34" charset="0"/>
                 <a:ea typeface="Courier New" pitchFamily="34" charset="-122"/>
@@ -13640,7 +13652,7 @@
             <a:r>
               <a:rPr lang="en-US" sz="1400" dirty="0">
                 <a:solidFill>
-                  <a:srgbClr val="C9D3F5"/>
+                  <a:srgbClr val="1F2429"/>
                 </a:solidFill>
                 <a:latin typeface="Courier New" pitchFamily="34" charset="0"/>
                 <a:ea typeface="Courier New" pitchFamily="34" charset="-122"/>
@@ -13660,7 +13672,7 @@
             <a:r>
               <a:rPr lang="en-US" sz="1400" dirty="0">
                 <a:solidFill>
-                  <a:srgbClr val="C9D3F5"/>
+                  <a:srgbClr val="1F2429"/>
                 </a:solidFill>
                 <a:latin typeface="Courier New" pitchFamily="34" charset="0"/>
                 <a:ea typeface="Courier New" pitchFamily="34" charset="-122"/>
@@ -13689,7 +13701,7 @@
             <a:r>
               <a:rPr lang="en-US" sz="1400" dirty="0">
                 <a:solidFill>
-                  <a:srgbClr val="C9D3F5"/>
+                  <a:srgbClr val="1F2429"/>
                 </a:solidFill>
                 <a:latin typeface="Courier New" pitchFamily="34" charset="0"/>
                 <a:ea typeface="Courier New" pitchFamily="34" charset="-122"/>
@@ -13709,7 +13721,7 @@
             <a:r>
               <a:rPr lang="en-US" sz="1400" dirty="0">
                 <a:solidFill>
-                  <a:srgbClr val="C9D3F5"/>
+                  <a:srgbClr val="1F2429"/>
                 </a:solidFill>
                 <a:latin typeface="Courier New" pitchFamily="34" charset="0"/>
                 <a:ea typeface="Courier New" pitchFamily="34" charset="-122"/>
@@ -13729,7 +13741,7 @@
             <a:r>
               <a:rPr lang="en-US" sz="1400" dirty="0">
                 <a:solidFill>
-                  <a:srgbClr val="C9D3F5"/>
+                  <a:srgbClr val="1F2429"/>
                 </a:solidFill>
                 <a:latin typeface="Courier New" pitchFamily="34" charset="0"/>
                 <a:ea typeface="Courier New" pitchFamily="34" charset="-122"/>
@@ -13749,7 +13761,7 @@
             <a:r>
               <a:rPr lang="en-US" sz="1400" dirty="0">
                 <a:solidFill>
-                  <a:srgbClr val="C9D3F5"/>
+                  <a:srgbClr val="1F2429"/>
                 </a:solidFill>
                 <a:latin typeface="Courier New" pitchFamily="34" charset="0"/>
                 <a:ea typeface="Courier New" pitchFamily="34" charset="-122"/>
@@ -15186,7 +15198,7 @@
         <p:spPr>
           <a:xfrm>
             <a:off x="640080" y="1965960"/>
-            <a:ext cx="10911535" cy="1645920"/>
+            <a:ext cx="10911535" cy="3657600"/>
           </a:xfrm>
           <a:prstGeom prst="roundRect">
             <a:avLst>
@@ -15217,7 +15229,7 @@
         <p:spPr>
           <a:xfrm>
             <a:off x="868680" y="2103120"/>
-            <a:ext cx="10454335" cy="274320"/>
+            <a:ext cx="10454335" cy="400000"/>
           </a:xfrm>
           <a:prstGeom prst="rect">
             <a:avLst/>
@@ -15233,7 +15245,7 @@
               <a:buNone/>
             </a:pPr>
             <a:r>
-              <a:rPr lang="en-US" sz="1000" b="1" spc="200" kern="0" dirty="0">
+              <a:rPr lang="en-US" sz="1800" b="1" spc="200" kern="0" dirty="0">
                 <a:solidFill>
                   <a:srgbClr val="33459E"/>
                 </a:solidFill>
@@ -15243,7 +15255,7 @@
               </a:rPr>
               <a:t>NOTE</a:t>
             </a:r>
-            <a:endParaRPr lang="en-US" sz="1000" dirty="0"/>
+            <a:endParaRPr lang="en-US" sz="1800" dirty="0"/>
           </a:p>
         </p:txBody>
       </p:sp>
@@ -15255,24 +15267,24 @@
         </p:nvSpPr>
         <p:spPr>
           <a:xfrm>
-            <a:off x="868680" y="2404872"/>
-            <a:ext cx="10454335" cy="1051560"/>
-          </a:xfrm>
-          <a:prstGeom prst="rect">
-            <a:avLst/>
-          </a:prstGeom>
-          <a:noFill/>
-          <a:ln/>
-        </p:spPr>
-        <p:txBody>
-          <a:bodyPr wrap="square" lIns="0" tIns="0" rIns="0" bIns="0" rtlCol="0" anchor="t"/>
+            <a:off x="868680" y="2795960"/>
+            <a:ext cx="10454335" cy="2500000"/>
+          </a:xfrm>
+          <a:prstGeom prst="rect">
+            <a:avLst/>
+          </a:prstGeom>
+          <a:noFill/>
+          <a:ln/>
+        </p:spPr>
+        <p:txBody>
+          <a:bodyPr wrap="square" lIns="0" tIns="0" rIns="0" bIns="0" rtlCol="0" anchor="ctr"/>
           <a:lstStyle/>
           <a:p>
             <a:pPr indent="0" marL="0">
               <a:buNone/>
             </a:pPr>
             <a:r>
-              <a:rPr lang="en-US" sz="1250" dirty="0">
+              <a:rPr lang="en-US" sz="2800" dirty="0">
                 <a:solidFill>
                   <a:srgbClr val="26262F"/>
                 </a:solidFill>
@@ -15282,7 +15294,7 @@
               </a:rPr>
               <a:t>You cannot make an application "100% secure." Security is about reducing risk to an acceptable level and reacting quickly when something goes wrong — not reaching some finish line where you are "done."</a:t>
             </a:r>
-            <a:endParaRPr lang="en-US" sz="1250" dirty="0"/>
+            <a:endParaRPr lang="en-US" sz="2800" dirty="0"/>
           </a:p>
         </p:txBody>
       </p:sp>
@@ -18058,7 +18070,7 @@
         <p:spPr>
           <a:xfrm>
             <a:off x="640080" y="1965960"/>
-            <a:ext cx="10911535" cy="1554480"/>
+            <a:ext cx="10911535" cy="3657600"/>
           </a:xfrm>
           <a:prstGeom prst="roundRect">
             <a:avLst>
@@ -18089,7 +18101,7 @@
         <p:spPr>
           <a:xfrm>
             <a:off x="868680" y="2103120"/>
-            <a:ext cx="10454335" cy="274320"/>
+            <a:ext cx="10454335" cy="400000"/>
           </a:xfrm>
           <a:prstGeom prst="rect">
             <a:avLst/>
@@ -18105,7 +18117,7 @@
               <a:buNone/>
             </a:pPr>
             <a:r>
-              <a:rPr lang="en-US" sz="1000" b="1" spc="200" kern="0" dirty="0">
+              <a:rPr lang="en-US" sz="1800" b="1" spc="200" kern="0" dirty="0">
                 <a:solidFill>
                   <a:srgbClr val="1F7A46"/>
                 </a:solidFill>
@@ -18115,7 +18127,7 @@
               </a:rPr>
               <a:t>TIP</a:t>
             </a:r>
-            <a:endParaRPr lang="en-US" sz="1000" dirty="0"/>
+            <a:endParaRPr lang="en-US" sz="1800" dirty="0"/>
           </a:p>
         </p:txBody>
       </p:sp>
@@ -18127,24 +18139,24 @@
         </p:nvSpPr>
         <p:spPr>
           <a:xfrm>
-            <a:off x="868680" y="2404872"/>
-            <a:ext cx="10454335" cy="960120"/>
-          </a:xfrm>
-          <a:prstGeom prst="rect">
-            <a:avLst/>
-          </a:prstGeom>
-          <a:noFill/>
-          <a:ln/>
-        </p:spPr>
-        <p:txBody>
-          <a:bodyPr wrap="square" lIns="0" tIns="0" rIns="0" bIns="0" rtlCol="0" anchor="t"/>
+            <a:off x="868680" y="2795960"/>
+            <a:ext cx="10454335" cy="2500000"/>
+          </a:xfrm>
+          <a:prstGeom prst="rect">
+            <a:avLst/>
+          </a:prstGeom>
+          <a:noFill/>
+          <a:ln/>
+        </p:spPr>
+        <p:txBody>
+          <a:bodyPr wrap="square" lIns="0" tIns="0" rIns="0" bIns="0" rtlCol="0" anchor="ctr"/>
           <a:lstStyle/>
           <a:p>
             <a:pPr indent="0" marL="0">
               <a:buNone/>
             </a:pPr>
             <a:r>
-              <a:rPr lang="en-US" sz="1250" dirty="0">
+              <a:rPr lang="en-US" sz="2800" dirty="0">
                 <a:solidFill>
                   <a:srgbClr val="26262F"/>
                 </a:solidFill>
@@ -18154,7 +18166,7 @@
               </a:rPr>
               <a:t>"What is the SMALLEST set of permissions this needs to do its job?" Grant that, not more. It is much easier to add a permission later than to clean up after a breach caused by over-broad access.</a:t>
             </a:r>
-            <a:endParaRPr lang="en-US" sz="1250" dirty="0"/>
+            <a:endParaRPr lang="en-US" sz="2800" dirty="0"/>
           </a:p>
         </p:txBody>
       </p:sp>
